--- a/Lecture Resources/Lecture Powerpoints/Chunk 8  - 1D Numpy.pptx
+++ b/Lecture Resources/Lecture Powerpoints/Chunk 8  - 1D Numpy.pptx
@@ -132,6 +132,99 @@
 
 <file path=ppt/changesInfos/changesInfo1.xml><?xml version="1.0" encoding="utf-8"?>
 <pc:chgInfo xmlns:a="http://schemas.openxmlformats.org/drawingml/2006/main" xmlns:r="http://schemas.openxmlformats.org/officeDocument/2006/relationships" xmlns:ac="http://schemas.microsoft.com/office/drawing/2013/main/command" xmlns:pc="http://schemas.microsoft.com/office/powerpoint/2013/main/command">
+  <pc:docChgLst>
+    <pc:chgData name="Jonathan Bollig" userId="8b5d0afe-f106-45e0-8c3f-fd98fa124db1" providerId="ADAL" clId="{891409C9-2319-433B-8001-2E1CE368518E}"/>
+    <pc:docChg chg="custSel addSld delSld modSld">
+      <pc:chgData name="Jonathan Bollig" userId="8b5d0afe-f106-45e0-8c3f-fd98fa124db1" providerId="ADAL" clId="{891409C9-2319-433B-8001-2E1CE368518E}" dt="2025-08-18T13:33:56.347" v="46" actId="47"/>
+      <pc:docMkLst>
+        <pc:docMk/>
+      </pc:docMkLst>
+      <pc:sldChg chg="modSp mod">
+        <pc:chgData name="Jonathan Bollig" userId="8b5d0afe-f106-45e0-8c3f-fd98fa124db1" providerId="ADAL" clId="{891409C9-2319-433B-8001-2E1CE368518E}" dt="2025-08-18T10:03:07.320" v="7" actId="20577"/>
+        <pc:sldMkLst>
+          <pc:docMk/>
+          <pc:sldMk cId="836289018" sldId="256"/>
+        </pc:sldMkLst>
+      </pc:sldChg>
+      <pc:sldChg chg="del">
+        <pc:chgData name="Jonathan Bollig" userId="8b5d0afe-f106-45e0-8c3f-fd98fa124db1" providerId="ADAL" clId="{891409C9-2319-433B-8001-2E1CE368518E}" dt="2025-08-18T09:57:07.527" v="0" actId="47"/>
+        <pc:sldMkLst>
+          <pc:docMk/>
+          <pc:sldMk cId="3656329933" sldId="257"/>
+        </pc:sldMkLst>
+      </pc:sldChg>
+      <pc:sldChg chg="del">
+        <pc:chgData name="Jonathan Bollig" userId="8b5d0afe-f106-45e0-8c3f-fd98fa124db1" providerId="ADAL" clId="{891409C9-2319-433B-8001-2E1CE368518E}" dt="2025-08-18T09:57:07.527" v="0" actId="47"/>
+        <pc:sldMkLst>
+          <pc:docMk/>
+          <pc:sldMk cId="544279955" sldId="258"/>
+        </pc:sldMkLst>
+      </pc:sldChg>
+      <pc:sldChg chg="delSp modSp del mod">
+        <pc:chgData name="Jonathan Bollig" userId="8b5d0afe-f106-45e0-8c3f-fd98fa124db1" providerId="ADAL" clId="{891409C9-2319-433B-8001-2E1CE368518E}" dt="2025-08-18T13:33:56.347" v="46" actId="47"/>
+        <pc:sldMkLst>
+          <pc:docMk/>
+          <pc:sldMk cId="2169503629" sldId="259"/>
+        </pc:sldMkLst>
+      </pc:sldChg>
+      <pc:sldChg chg="add">
+        <pc:chgData name="Jonathan Bollig" userId="8b5d0afe-f106-45e0-8c3f-fd98fa124db1" providerId="ADAL" clId="{891409C9-2319-433B-8001-2E1CE368518E}" dt="2025-08-18T13:33:54.473" v="45"/>
+        <pc:sldMkLst>
+          <pc:docMk/>
+          <pc:sldMk cId="932306145" sldId="260"/>
+        </pc:sldMkLst>
+      </pc:sldChg>
+      <pc:sldChg chg="del">
+        <pc:chgData name="Jonathan Bollig" userId="8b5d0afe-f106-45e0-8c3f-fd98fa124db1" providerId="ADAL" clId="{891409C9-2319-433B-8001-2E1CE368518E}" dt="2025-08-18T09:57:07.527" v="0" actId="47"/>
+        <pc:sldMkLst>
+          <pc:docMk/>
+          <pc:sldMk cId="2533283895" sldId="260"/>
+        </pc:sldMkLst>
+      </pc:sldChg>
+      <pc:sldChg chg="del">
+        <pc:chgData name="Jonathan Bollig" userId="8b5d0afe-f106-45e0-8c3f-fd98fa124db1" providerId="ADAL" clId="{891409C9-2319-433B-8001-2E1CE368518E}" dt="2025-08-18T09:57:07.527" v="0" actId="47"/>
+        <pc:sldMkLst>
+          <pc:docMk/>
+          <pc:sldMk cId="847849653" sldId="261"/>
+        </pc:sldMkLst>
+      </pc:sldChg>
+      <pc:sldChg chg="del">
+        <pc:chgData name="Jonathan Bollig" userId="8b5d0afe-f106-45e0-8c3f-fd98fa124db1" providerId="ADAL" clId="{891409C9-2319-433B-8001-2E1CE368518E}" dt="2025-08-18T09:57:07.527" v="0" actId="47"/>
+        <pc:sldMkLst>
+          <pc:docMk/>
+          <pc:sldMk cId="1908144578" sldId="262"/>
+        </pc:sldMkLst>
+      </pc:sldChg>
+      <pc:sldChg chg="del">
+        <pc:chgData name="Jonathan Bollig" userId="8b5d0afe-f106-45e0-8c3f-fd98fa124db1" providerId="ADAL" clId="{891409C9-2319-433B-8001-2E1CE368518E}" dt="2025-08-18T09:57:07.527" v="0" actId="47"/>
+        <pc:sldMkLst>
+          <pc:docMk/>
+          <pc:sldMk cId="4076698392" sldId="263"/>
+        </pc:sldMkLst>
+      </pc:sldChg>
+      <pc:sldChg chg="del">
+        <pc:chgData name="Jonathan Bollig" userId="8b5d0afe-f106-45e0-8c3f-fd98fa124db1" providerId="ADAL" clId="{891409C9-2319-433B-8001-2E1CE368518E}" dt="2025-08-18T09:57:07.527" v="0" actId="47"/>
+        <pc:sldMkLst>
+          <pc:docMk/>
+          <pc:sldMk cId="3708449378" sldId="264"/>
+        </pc:sldMkLst>
+      </pc:sldChg>
+      <pc:sldChg chg="del">
+        <pc:chgData name="Jonathan Bollig" userId="8b5d0afe-f106-45e0-8c3f-fd98fa124db1" providerId="ADAL" clId="{891409C9-2319-433B-8001-2E1CE368518E}" dt="2025-08-18T09:57:07.527" v="0" actId="47"/>
+        <pc:sldMkLst>
+          <pc:docMk/>
+          <pc:sldMk cId="933916611" sldId="265"/>
+        </pc:sldMkLst>
+      </pc:sldChg>
+      <pc:sldChg chg="del">
+        <pc:chgData name="Jonathan Bollig" userId="8b5d0afe-f106-45e0-8c3f-fd98fa124db1" providerId="ADAL" clId="{891409C9-2319-433B-8001-2E1CE368518E}" dt="2025-08-18T09:57:07.527" v="0" actId="47"/>
+        <pc:sldMkLst>
+          <pc:docMk/>
+          <pc:sldMk cId="2117799034" sldId="266"/>
+        </pc:sldMkLst>
+      </pc:sldChg>
+    </pc:docChg>
+  </pc:docChgLst>
   <pc:docChgLst>
     <pc:chgData name="Jonathan Bollig" userId="8b5d0afe-f106-45e0-8c3f-fd98fa124db1" providerId="ADAL" clId="{B108959E-8160-4214-BA0D-42D2F1070C03}"/>
     <pc:docChg chg="undo custSel addSld modSld sldOrd">
@@ -581,99 +674,6 @@
       </pc:sldChg>
     </pc:docChg>
   </pc:docChgLst>
-  <pc:docChgLst>
-    <pc:chgData name="Jonathan Bollig" userId="8b5d0afe-f106-45e0-8c3f-fd98fa124db1" providerId="ADAL" clId="{891409C9-2319-433B-8001-2E1CE368518E}"/>
-    <pc:docChg chg="custSel addSld delSld modSld">
-      <pc:chgData name="Jonathan Bollig" userId="8b5d0afe-f106-45e0-8c3f-fd98fa124db1" providerId="ADAL" clId="{891409C9-2319-433B-8001-2E1CE368518E}" dt="2025-08-18T13:33:56.347" v="46" actId="47"/>
-      <pc:docMkLst>
-        <pc:docMk/>
-      </pc:docMkLst>
-      <pc:sldChg chg="modSp mod">
-        <pc:chgData name="Jonathan Bollig" userId="8b5d0afe-f106-45e0-8c3f-fd98fa124db1" providerId="ADAL" clId="{891409C9-2319-433B-8001-2E1CE368518E}" dt="2025-08-18T10:03:07.320" v="7" actId="20577"/>
-        <pc:sldMkLst>
-          <pc:docMk/>
-          <pc:sldMk cId="836289018" sldId="256"/>
-        </pc:sldMkLst>
-      </pc:sldChg>
-      <pc:sldChg chg="del">
-        <pc:chgData name="Jonathan Bollig" userId="8b5d0afe-f106-45e0-8c3f-fd98fa124db1" providerId="ADAL" clId="{891409C9-2319-433B-8001-2E1CE368518E}" dt="2025-08-18T09:57:07.527" v="0" actId="47"/>
-        <pc:sldMkLst>
-          <pc:docMk/>
-          <pc:sldMk cId="3656329933" sldId="257"/>
-        </pc:sldMkLst>
-      </pc:sldChg>
-      <pc:sldChg chg="del">
-        <pc:chgData name="Jonathan Bollig" userId="8b5d0afe-f106-45e0-8c3f-fd98fa124db1" providerId="ADAL" clId="{891409C9-2319-433B-8001-2E1CE368518E}" dt="2025-08-18T09:57:07.527" v="0" actId="47"/>
-        <pc:sldMkLst>
-          <pc:docMk/>
-          <pc:sldMk cId="544279955" sldId="258"/>
-        </pc:sldMkLst>
-      </pc:sldChg>
-      <pc:sldChg chg="delSp modSp del mod">
-        <pc:chgData name="Jonathan Bollig" userId="8b5d0afe-f106-45e0-8c3f-fd98fa124db1" providerId="ADAL" clId="{891409C9-2319-433B-8001-2E1CE368518E}" dt="2025-08-18T13:33:56.347" v="46" actId="47"/>
-        <pc:sldMkLst>
-          <pc:docMk/>
-          <pc:sldMk cId="2169503629" sldId="259"/>
-        </pc:sldMkLst>
-      </pc:sldChg>
-      <pc:sldChg chg="add">
-        <pc:chgData name="Jonathan Bollig" userId="8b5d0afe-f106-45e0-8c3f-fd98fa124db1" providerId="ADAL" clId="{891409C9-2319-433B-8001-2E1CE368518E}" dt="2025-08-18T13:33:54.473" v="45"/>
-        <pc:sldMkLst>
-          <pc:docMk/>
-          <pc:sldMk cId="932306145" sldId="260"/>
-        </pc:sldMkLst>
-      </pc:sldChg>
-      <pc:sldChg chg="del">
-        <pc:chgData name="Jonathan Bollig" userId="8b5d0afe-f106-45e0-8c3f-fd98fa124db1" providerId="ADAL" clId="{891409C9-2319-433B-8001-2E1CE368518E}" dt="2025-08-18T09:57:07.527" v="0" actId="47"/>
-        <pc:sldMkLst>
-          <pc:docMk/>
-          <pc:sldMk cId="2533283895" sldId="260"/>
-        </pc:sldMkLst>
-      </pc:sldChg>
-      <pc:sldChg chg="del">
-        <pc:chgData name="Jonathan Bollig" userId="8b5d0afe-f106-45e0-8c3f-fd98fa124db1" providerId="ADAL" clId="{891409C9-2319-433B-8001-2E1CE368518E}" dt="2025-08-18T09:57:07.527" v="0" actId="47"/>
-        <pc:sldMkLst>
-          <pc:docMk/>
-          <pc:sldMk cId="847849653" sldId="261"/>
-        </pc:sldMkLst>
-      </pc:sldChg>
-      <pc:sldChg chg="del">
-        <pc:chgData name="Jonathan Bollig" userId="8b5d0afe-f106-45e0-8c3f-fd98fa124db1" providerId="ADAL" clId="{891409C9-2319-433B-8001-2E1CE368518E}" dt="2025-08-18T09:57:07.527" v="0" actId="47"/>
-        <pc:sldMkLst>
-          <pc:docMk/>
-          <pc:sldMk cId="1908144578" sldId="262"/>
-        </pc:sldMkLst>
-      </pc:sldChg>
-      <pc:sldChg chg="del">
-        <pc:chgData name="Jonathan Bollig" userId="8b5d0afe-f106-45e0-8c3f-fd98fa124db1" providerId="ADAL" clId="{891409C9-2319-433B-8001-2E1CE368518E}" dt="2025-08-18T09:57:07.527" v="0" actId="47"/>
-        <pc:sldMkLst>
-          <pc:docMk/>
-          <pc:sldMk cId="4076698392" sldId="263"/>
-        </pc:sldMkLst>
-      </pc:sldChg>
-      <pc:sldChg chg="del">
-        <pc:chgData name="Jonathan Bollig" userId="8b5d0afe-f106-45e0-8c3f-fd98fa124db1" providerId="ADAL" clId="{891409C9-2319-433B-8001-2E1CE368518E}" dt="2025-08-18T09:57:07.527" v="0" actId="47"/>
-        <pc:sldMkLst>
-          <pc:docMk/>
-          <pc:sldMk cId="3708449378" sldId="264"/>
-        </pc:sldMkLst>
-      </pc:sldChg>
-      <pc:sldChg chg="del">
-        <pc:chgData name="Jonathan Bollig" userId="8b5d0afe-f106-45e0-8c3f-fd98fa124db1" providerId="ADAL" clId="{891409C9-2319-433B-8001-2E1CE368518E}" dt="2025-08-18T09:57:07.527" v="0" actId="47"/>
-        <pc:sldMkLst>
-          <pc:docMk/>
-          <pc:sldMk cId="933916611" sldId="265"/>
-        </pc:sldMkLst>
-      </pc:sldChg>
-      <pc:sldChg chg="del">
-        <pc:chgData name="Jonathan Bollig" userId="8b5d0afe-f106-45e0-8c3f-fd98fa124db1" providerId="ADAL" clId="{891409C9-2319-433B-8001-2E1CE368518E}" dt="2025-08-18T09:57:07.527" v="0" actId="47"/>
-        <pc:sldMkLst>
-          <pc:docMk/>
-          <pc:sldMk cId="2117799034" sldId="266"/>
-        </pc:sldMkLst>
-      </pc:sldChg>
-    </pc:docChg>
-  </pc:docChgLst>
 </pc:chgInfo>
 </file>
 
@@ -759,7 +759,7 @@
           <a:p>
             <a:fld id="{0B6CA2EE-5589-4682-AD7F-744DBF1E81F5}" type="datetimeFigureOut">
               <a:rPr lang="de-DE" smtClean="0"/>
-              <a:t>07.10.2025</a:t>
+              <a:t>08.10.2025</a:t>
             </a:fld>
             <a:endParaRPr lang="de-DE"/>
           </a:p>
@@ -917,7 +917,7 @@
           <a:p>
             <a:fld id="{11422C3B-6429-4381-8F08-B422F3CD22BF}" type="slidenum">
               <a:rPr lang="de-DE" smtClean="0"/>
-              <a:t>‹Nr.›</a:t>
+              <a:t>‹#›</a:t>
             </a:fld>
             <a:endParaRPr lang="de-DE"/>
           </a:p>
@@ -1173,7 +1173,7 @@
           <a:p>
             <a:fld id="{ADA51F25-4808-47F4-BF6E-BCDC230DB01C}" type="datetimeFigureOut">
               <a:rPr lang="de-DE" smtClean="0"/>
-              <a:t>07.10.2025</a:t>
+              <a:t>08.10.2025</a:t>
             </a:fld>
             <a:endParaRPr lang="de-DE"/>
           </a:p>
@@ -1227,7 +1227,7 @@
           <a:p>
             <a:fld id="{C018A060-D51C-4243-8F88-61D66D5570B8}" type="slidenum">
               <a:rPr lang="de-DE" smtClean="0"/>
-              <a:t>‹Nr.›</a:t>
+              <a:t>‹#›</a:t>
             </a:fld>
             <a:endParaRPr lang="de-DE"/>
           </a:p>
@@ -1371,7 +1371,7 @@
           <a:p>
             <a:fld id="{ADA51F25-4808-47F4-BF6E-BCDC230DB01C}" type="datetimeFigureOut">
               <a:rPr lang="de-DE" smtClean="0"/>
-              <a:t>07.10.2025</a:t>
+              <a:t>08.10.2025</a:t>
             </a:fld>
             <a:endParaRPr lang="de-DE"/>
           </a:p>
@@ -1425,7 +1425,7 @@
           <a:p>
             <a:fld id="{C018A060-D51C-4243-8F88-61D66D5570B8}" type="slidenum">
               <a:rPr lang="de-DE" smtClean="0"/>
-              <a:t>‹Nr.›</a:t>
+              <a:t>‹#›</a:t>
             </a:fld>
             <a:endParaRPr lang="de-DE"/>
           </a:p>
@@ -1579,7 +1579,7 @@
           <a:p>
             <a:fld id="{ADA51F25-4808-47F4-BF6E-BCDC230DB01C}" type="datetimeFigureOut">
               <a:rPr lang="de-DE" smtClean="0"/>
-              <a:t>07.10.2025</a:t>
+              <a:t>08.10.2025</a:t>
             </a:fld>
             <a:endParaRPr lang="de-DE"/>
           </a:p>
@@ -1633,7 +1633,7 @@
           <a:p>
             <a:fld id="{C018A060-D51C-4243-8F88-61D66D5570B8}" type="slidenum">
               <a:rPr lang="de-DE" smtClean="0"/>
-              <a:t>‹Nr.›</a:t>
+              <a:t>‹#›</a:t>
             </a:fld>
             <a:endParaRPr lang="de-DE"/>
           </a:p>
@@ -1777,7 +1777,7 @@
           <a:p>
             <a:fld id="{ADA51F25-4808-47F4-BF6E-BCDC230DB01C}" type="datetimeFigureOut">
               <a:rPr lang="de-DE" smtClean="0"/>
-              <a:t>07.10.2025</a:t>
+              <a:t>08.10.2025</a:t>
             </a:fld>
             <a:endParaRPr lang="de-DE"/>
           </a:p>
@@ -1831,7 +1831,7 @@
           <a:p>
             <a:fld id="{C018A060-D51C-4243-8F88-61D66D5570B8}" type="slidenum">
               <a:rPr lang="de-DE" smtClean="0"/>
-              <a:t>‹Nr.›</a:t>
+              <a:t>‹#›</a:t>
             </a:fld>
             <a:endParaRPr lang="de-DE"/>
           </a:p>
@@ -2052,7 +2052,7 @@
           <a:p>
             <a:fld id="{ADA51F25-4808-47F4-BF6E-BCDC230DB01C}" type="datetimeFigureOut">
               <a:rPr lang="de-DE" smtClean="0"/>
-              <a:t>07.10.2025</a:t>
+              <a:t>08.10.2025</a:t>
             </a:fld>
             <a:endParaRPr lang="de-DE"/>
           </a:p>
@@ -2106,7 +2106,7 @@
           <a:p>
             <a:fld id="{C018A060-D51C-4243-8F88-61D66D5570B8}" type="slidenum">
               <a:rPr lang="de-DE" smtClean="0"/>
-              <a:t>‹Nr.›</a:t>
+              <a:t>‹#›</a:t>
             </a:fld>
             <a:endParaRPr lang="de-DE"/>
           </a:p>
@@ -2317,7 +2317,7 @@
           <a:p>
             <a:fld id="{ADA51F25-4808-47F4-BF6E-BCDC230DB01C}" type="datetimeFigureOut">
               <a:rPr lang="de-DE" smtClean="0"/>
-              <a:t>07.10.2025</a:t>
+              <a:t>08.10.2025</a:t>
             </a:fld>
             <a:endParaRPr lang="de-DE"/>
           </a:p>
@@ -2371,7 +2371,7 @@
           <a:p>
             <a:fld id="{C018A060-D51C-4243-8F88-61D66D5570B8}" type="slidenum">
               <a:rPr lang="de-DE" smtClean="0"/>
-              <a:t>‹Nr.›</a:t>
+              <a:t>‹#›</a:t>
             </a:fld>
             <a:endParaRPr lang="de-DE"/>
           </a:p>
@@ -2729,7 +2729,7 @@
           <a:p>
             <a:fld id="{ADA51F25-4808-47F4-BF6E-BCDC230DB01C}" type="datetimeFigureOut">
               <a:rPr lang="de-DE" smtClean="0"/>
-              <a:t>07.10.2025</a:t>
+              <a:t>08.10.2025</a:t>
             </a:fld>
             <a:endParaRPr lang="de-DE"/>
           </a:p>
@@ -2783,7 +2783,7 @@
           <a:p>
             <a:fld id="{C018A060-D51C-4243-8F88-61D66D5570B8}" type="slidenum">
               <a:rPr lang="de-DE" smtClean="0"/>
-              <a:t>‹Nr.›</a:t>
+              <a:t>‹#›</a:t>
             </a:fld>
             <a:endParaRPr lang="de-DE"/>
           </a:p>
@@ -2870,7 +2870,7 @@
           <a:p>
             <a:fld id="{ADA51F25-4808-47F4-BF6E-BCDC230DB01C}" type="datetimeFigureOut">
               <a:rPr lang="de-DE" smtClean="0"/>
-              <a:t>07.10.2025</a:t>
+              <a:t>08.10.2025</a:t>
             </a:fld>
             <a:endParaRPr lang="de-DE"/>
           </a:p>
@@ -2924,7 +2924,7 @@
           <a:p>
             <a:fld id="{C018A060-D51C-4243-8F88-61D66D5570B8}" type="slidenum">
               <a:rPr lang="de-DE" smtClean="0"/>
-              <a:t>‹Nr.›</a:t>
+              <a:t>‹#›</a:t>
             </a:fld>
             <a:endParaRPr lang="de-DE"/>
           </a:p>
@@ -2983,7 +2983,7 @@
           <a:p>
             <a:fld id="{ADA51F25-4808-47F4-BF6E-BCDC230DB01C}" type="datetimeFigureOut">
               <a:rPr lang="de-DE" smtClean="0"/>
-              <a:t>07.10.2025</a:t>
+              <a:t>08.10.2025</a:t>
             </a:fld>
             <a:endParaRPr lang="de-DE"/>
           </a:p>
@@ -3037,7 +3037,7 @@
           <a:p>
             <a:fld id="{C018A060-D51C-4243-8F88-61D66D5570B8}" type="slidenum">
               <a:rPr lang="de-DE" smtClean="0"/>
-              <a:t>‹Nr.›</a:t>
+              <a:t>‹#›</a:t>
             </a:fld>
             <a:endParaRPr lang="de-DE"/>
           </a:p>
@@ -3294,7 +3294,7 @@
           <a:p>
             <a:fld id="{ADA51F25-4808-47F4-BF6E-BCDC230DB01C}" type="datetimeFigureOut">
               <a:rPr lang="de-DE" smtClean="0"/>
-              <a:t>07.10.2025</a:t>
+              <a:t>08.10.2025</a:t>
             </a:fld>
             <a:endParaRPr lang="de-DE"/>
           </a:p>
@@ -3348,7 +3348,7 @@
           <a:p>
             <a:fld id="{C018A060-D51C-4243-8F88-61D66D5570B8}" type="slidenum">
               <a:rPr lang="de-DE" smtClean="0"/>
-              <a:t>‹Nr.›</a:t>
+              <a:t>‹#›</a:t>
             </a:fld>
             <a:endParaRPr lang="de-DE"/>
           </a:p>
@@ -3582,7 +3582,7 @@
           <a:p>
             <a:fld id="{ADA51F25-4808-47F4-BF6E-BCDC230DB01C}" type="datetimeFigureOut">
               <a:rPr lang="de-DE" smtClean="0"/>
-              <a:t>07.10.2025</a:t>
+              <a:t>08.10.2025</a:t>
             </a:fld>
             <a:endParaRPr lang="de-DE"/>
           </a:p>
@@ -3636,7 +3636,7 @@
           <a:p>
             <a:fld id="{C018A060-D51C-4243-8F88-61D66D5570B8}" type="slidenum">
               <a:rPr lang="de-DE" smtClean="0"/>
-              <a:t>‹Nr.›</a:t>
+              <a:t>‹#›</a:t>
             </a:fld>
             <a:endParaRPr lang="de-DE"/>
           </a:p>
@@ -3823,7 +3823,7 @@
           <a:p>
             <a:fld id="{ADA51F25-4808-47F4-BF6E-BCDC230DB01C}" type="datetimeFigureOut">
               <a:rPr lang="de-DE" smtClean="0"/>
-              <a:t>07.10.2025</a:t>
+              <a:t>08.10.2025</a:t>
             </a:fld>
             <a:endParaRPr lang="de-DE"/>
           </a:p>
@@ -3913,7 +3913,7 @@
           <a:p>
             <a:fld id="{C018A060-D51C-4243-8F88-61D66D5570B8}" type="slidenum">
               <a:rPr lang="de-DE" smtClean="0"/>
-              <a:t>‹Nr.›</a:t>
+              <a:t>‹#›</a:t>
             </a:fld>
             <a:endParaRPr lang="de-DE"/>
           </a:p>
@@ -4256,7 +4256,12 @@
             <p:ph type="ctrTitle"/>
           </p:nvPr>
         </p:nvSpPr>
-        <p:spPr/>
+        <p:spPr>
+          <a:xfrm>
+            <a:off x="1524000" y="1411730"/>
+            <a:ext cx="9144000" cy="2387600"/>
+          </a:xfrm>
+        </p:spPr>
         <p:txBody>
           <a:bodyPr>
             <a:normAutofit fontScale="90000"/>
@@ -4275,26 +4280,29 @@
               <a:t>(And everyone else!)</a:t>
             </a:r>
             <a:br>
+              <a:rPr lang="en-US" dirty="0"/>
+            </a:br>
+            <a:br>
               <a:rPr lang="en-US" noProof="0" dirty="0"/>
             </a:br>
             <a:r>
-              <a:rPr lang="en-US" noProof="0" dirty="0"/>
+              <a:rPr lang="en-US" b="1" noProof="0" dirty="0"/>
               <a:t>Chunk </a:t>
             </a:r>
             <a:r>
-              <a:rPr lang="en-US" dirty="0"/>
+              <a:rPr lang="en-US" b="1" dirty="0"/>
               <a:t>8</a:t>
             </a:r>
             <a:r>
-              <a:rPr lang="en-US" noProof="0" dirty="0"/>
+              <a:rPr lang="en-US" b="1" noProof="0" dirty="0"/>
               <a:t>: 1D </a:t>
             </a:r>
             <a:r>
-              <a:rPr lang="en-US" noProof="0" dirty="0" err="1"/>
+              <a:rPr lang="en-US" b="1" noProof="0" dirty="0" err="1"/>
               <a:t>Numpy</a:t>
             </a:r>
             <a:r>
-              <a:rPr lang="en-US" noProof="0" dirty="0"/>
+              <a:rPr lang="en-US" b="1" noProof="0" dirty="0"/>
               <a:t> Arrays</a:t>
             </a:r>
           </a:p>
@@ -4316,7 +4324,12 @@
             <p:ph type="subTitle" idx="1"/>
           </p:nvPr>
         </p:nvSpPr>
-        <p:spPr/>
+        <p:spPr>
+          <a:xfrm>
+            <a:off x="1524000" y="4620610"/>
+            <a:ext cx="9144000" cy="1655762"/>
+          </a:xfrm>
+        </p:spPr>
         <p:txBody>
           <a:bodyPr/>
           <a:lstStyle/>
@@ -4328,10 +4341,9 @@
           </a:p>
           <a:p>
             <a:r>
-              <a:rPr lang="en-US" noProof="0"/>
+              <a:rPr lang="en-US" noProof="0" dirty="0"/>
               <a:t>09.10.2025</a:t>
             </a:r>
-            <a:endParaRPr lang="en-US" noProof="0" dirty="0"/>
           </a:p>
         </p:txBody>
       </p:sp>
@@ -4434,7 +4446,9 @@
           </a:xfrm>
         </p:spPr>
         <p:txBody>
-          <a:bodyPr/>
+          <a:bodyPr>
+            <a:normAutofit lnSpcReduction="10000"/>
+          </a:bodyPr>
           <a:lstStyle/>
           <a:p>
             <a:r>
@@ -4448,7 +4462,7 @@
               <a:rPr lang="en-US" dirty="0">
                 <a:sym typeface="Wingdings" panose="05000000000000000000" pitchFamily="2" charset="2"/>
               </a:rPr>
-              <a:t> Example: square 100 000 000 numbers and square them</a:t>
+              <a:t> Example: square 100 000 000 numbers and sum them</a:t>
             </a:r>
             <a:br>
               <a:rPr lang="en-US" dirty="0">
@@ -4464,6 +4478,9 @@
             <a:endParaRPr lang="en-US" dirty="0"/>
           </a:p>
           <a:p>
+            <a:endParaRPr lang="en-US" dirty="0"/>
+          </a:p>
+          <a:p>
             <a:r>
               <a:rPr lang="en-US" dirty="0"/>
               <a:t>Solution: Using C-code in python</a:t>
@@ -4500,6 +4517,11 @@
               </a:rPr>
               <a:t> is typically 10 – 100 x faster</a:t>
             </a:r>
+          </a:p>
+          <a:p>
+            <a:endParaRPr lang="en-US" dirty="0">
+              <a:sym typeface="Wingdings" panose="05000000000000000000" pitchFamily="2" charset="2"/>
+            </a:endParaRPr>
           </a:p>
           <a:p>
             <a:r>
@@ -4663,8 +4685,8 @@
         </p:nvSpPr>
         <p:spPr>
           <a:xfrm>
-            <a:off x="7444876" y="4494276"/>
-            <a:ext cx="3390764" cy="248716"/>
+            <a:off x="7396223" y="4494275"/>
+            <a:ext cx="3439417" cy="267007"/>
           </a:xfrm>
           <a:prstGeom prst="rect">
             <a:avLst/>
@@ -4713,6 +4735,191 @@
   <p:clrMapOvr>
     <a:masterClrMapping/>
   </p:clrMapOvr>
+  <p:timing>
+    <p:tnLst>
+      <p:par>
+        <p:cTn id="1" dur="indefinite" restart="never" nodeType="tmRoot">
+          <p:childTnLst>
+            <p:seq concurrent="1" nextAc="seek">
+              <p:cTn id="2" dur="indefinite" nodeType="mainSeq">
+                <p:childTnLst>
+                  <p:par>
+                    <p:cTn id="3" fill="hold">
+                      <p:stCondLst>
+                        <p:cond delay="indefinite"/>
+                      </p:stCondLst>
+                      <p:childTnLst>
+                        <p:par>
+                          <p:cTn id="4" fill="hold">
+                            <p:stCondLst>
+                              <p:cond delay="0"/>
+                            </p:stCondLst>
+                            <p:childTnLst>
+                              <p:par>
+                                <p:cTn id="5" presetID="1" presetClass="entr" presetSubtype="0" fill="hold" nodeType="clickEffect">
+                                  <p:stCondLst>
+                                    <p:cond delay="0"/>
+                                  </p:stCondLst>
+                                  <p:childTnLst>
+                                    <p:set>
+                                      <p:cBhvr>
+                                        <p:cTn id="6" dur="1" fill="hold">
+                                          <p:stCondLst>
+                                            <p:cond delay="0"/>
+                                          </p:stCondLst>
+                                        </p:cTn>
+                                        <p:tgtEl>
+                                          <p:spTgt spid="3">
+                                            <p:txEl>
+                                              <p:pRg st="2" end="2"/>
+                                            </p:txEl>
+                                          </p:spTgt>
+                                        </p:tgtEl>
+                                        <p:attrNameLst>
+                                          <p:attrName>style.visibility</p:attrName>
+                                        </p:attrNameLst>
+                                      </p:cBhvr>
+                                      <p:to>
+                                        <p:strVal val="visible"/>
+                                      </p:to>
+                                    </p:set>
+                                  </p:childTnLst>
+                                </p:cTn>
+                              </p:par>
+                              <p:par>
+                                <p:cTn id="7" presetID="1" presetClass="entr" presetSubtype="0" fill="hold" nodeType="withEffect">
+                                  <p:stCondLst>
+                                    <p:cond delay="0"/>
+                                  </p:stCondLst>
+                                  <p:childTnLst>
+                                    <p:set>
+                                      <p:cBhvr>
+                                        <p:cTn id="8" dur="1" fill="hold">
+                                          <p:stCondLst>
+                                            <p:cond delay="0"/>
+                                          </p:stCondLst>
+                                        </p:cTn>
+                                        <p:tgtEl>
+                                          <p:spTgt spid="7"/>
+                                        </p:tgtEl>
+                                        <p:attrNameLst>
+                                          <p:attrName>style.visibility</p:attrName>
+                                        </p:attrNameLst>
+                                      </p:cBhvr>
+                                      <p:to>
+                                        <p:strVal val="visible"/>
+                                      </p:to>
+                                    </p:set>
+                                  </p:childTnLst>
+                                </p:cTn>
+                              </p:par>
+                              <p:par>
+                                <p:cTn id="9" presetID="1" presetClass="entr" presetSubtype="0" fill="hold" grpId="0" nodeType="withEffect">
+                                  <p:stCondLst>
+                                    <p:cond delay="0"/>
+                                  </p:stCondLst>
+                                  <p:childTnLst>
+                                    <p:set>
+                                      <p:cBhvr>
+                                        <p:cTn id="10" dur="1" fill="hold">
+                                          <p:stCondLst>
+                                            <p:cond delay="0"/>
+                                          </p:stCondLst>
+                                        </p:cTn>
+                                        <p:tgtEl>
+                                          <p:spTgt spid="9"/>
+                                        </p:tgtEl>
+                                        <p:attrNameLst>
+                                          <p:attrName>style.visibility</p:attrName>
+                                        </p:attrNameLst>
+                                      </p:cBhvr>
+                                      <p:to>
+                                        <p:strVal val="visible"/>
+                                      </p:to>
+                                    </p:set>
+                                  </p:childTnLst>
+                                </p:cTn>
+                              </p:par>
+                            </p:childTnLst>
+                          </p:cTn>
+                        </p:par>
+                      </p:childTnLst>
+                    </p:cTn>
+                  </p:par>
+                  <p:par>
+                    <p:cTn id="11" fill="hold">
+                      <p:stCondLst>
+                        <p:cond delay="indefinite"/>
+                      </p:stCondLst>
+                      <p:childTnLst>
+                        <p:par>
+                          <p:cTn id="12" fill="hold">
+                            <p:stCondLst>
+                              <p:cond delay="0"/>
+                            </p:stCondLst>
+                            <p:childTnLst>
+                              <p:par>
+                                <p:cTn id="13" presetID="1" presetClass="entr" presetSubtype="0" fill="hold" nodeType="clickEffect">
+                                  <p:stCondLst>
+                                    <p:cond delay="0"/>
+                                  </p:stCondLst>
+                                  <p:childTnLst>
+                                    <p:set>
+                                      <p:cBhvr>
+                                        <p:cTn id="14" dur="1" fill="hold">
+                                          <p:stCondLst>
+                                            <p:cond delay="0"/>
+                                          </p:stCondLst>
+                                        </p:cTn>
+                                        <p:tgtEl>
+                                          <p:spTgt spid="3">
+                                            <p:txEl>
+                                              <p:pRg st="4" end="4"/>
+                                            </p:txEl>
+                                          </p:spTgt>
+                                        </p:tgtEl>
+                                        <p:attrNameLst>
+                                          <p:attrName>style.visibility</p:attrName>
+                                        </p:attrNameLst>
+                                      </p:cBhvr>
+                                      <p:to>
+                                        <p:strVal val="visible"/>
+                                      </p:to>
+                                    </p:set>
+                                  </p:childTnLst>
+                                </p:cTn>
+                              </p:par>
+                            </p:childTnLst>
+                          </p:cTn>
+                        </p:par>
+                      </p:childTnLst>
+                    </p:cTn>
+                  </p:par>
+                </p:childTnLst>
+              </p:cTn>
+              <p:prevCondLst>
+                <p:cond evt="onPrev" delay="0">
+                  <p:tgtEl>
+                    <p:sldTgt/>
+                  </p:tgtEl>
+                </p:cond>
+              </p:prevCondLst>
+              <p:nextCondLst>
+                <p:cond evt="onNext" delay="0">
+                  <p:tgtEl>
+                    <p:sldTgt/>
+                  </p:tgtEl>
+                </p:cond>
+              </p:nextCondLst>
+            </p:seq>
+          </p:childTnLst>
+        </p:cTn>
+      </p:par>
+    </p:tnLst>
+    <p:bldLst>
+      <p:bldP spid="9" grpId="0" animBg="1"/>
+    </p:bldLst>
+  </p:timing>
 </p:sld>
 </file>
 
@@ -5056,7 +5263,7 @@
         </p:blipFill>
         <p:spPr>
           <a:xfrm>
-            <a:off x="6254496" y="1861507"/>
+            <a:off x="8337939" y="1282834"/>
             <a:ext cx="2580615" cy="2623626"/>
           </a:xfrm>
           <a:prstGeom prst="rect">
@@ -5089,9 +5296,9 @@
           <p:nvPr/>
         </p:nvCxnSpPr>
         <p:spPr>
-          <a:xfrm>
-            <a:off x="3550158" y="2928747"/>
-            <a:ext cx="2763774" cy="11931"/>
+          <a:xfrm flipV="1">
+            <a:off x="3550158" y="2399786"/>
+            <a:ext cx="4787781" cy="528961"/>
           </a:xfrm>
           <a:prstGeom prst="straightConnector1">
             <a:avLst/>
@@ -5132,8 +5339,8 @@
         </p:nvCxnSpPr>
         <p:spPr>
           <a:xfrm flipV="1">
-            <a:off x="3890010" y="3408598"/>
-            <a:ext cx="2364486" cy="408641"/>
+            <a:off x="3890010" y="2801354"/>
+            <a:ext cx="4447929" cy="1015885"/>
           </a:xfrm>
           <a:prstGeom prst="straightConnector1">
             <a:avLst/>
@@ -5180,7 +5387,7 @@
         </p:blipFill>
         <p:spPr>
           <a:xfrm>
-            <a:off x="4305300" y="4584188"/>
+            <a:off x="5753100" y="4308028"/>
             <a:ext cx="2895600" cy="1061336"/>
           </a:xfrm>
           <a:prstGeom prst="rect">
@@ -6411,7 +6618,7 @@
         </p:nvSpPr>
         <p:spPr>
           <a:xfrm>
-            <a:off x="838200" y="1537303"/>
+            <a:off x="838199" y="784948"/>
             <a:ext cx="10515600" cy="1325563"/>
           </a:xfrm>
         </p:spPr>
@@ -6448,7 +6655,7 @@
         </p:nvSpPr>
         <p:spPr>
           <a:xfrm>
-            <a:off x="4333822" y="6596087"/>
+            <a:off x="4275949" y="6271253"/>
             <a:ext cx="5535683" cy="276999"/>
           </a:xfrm>
           <a:prstGeom prst="rect">
@@ -6517,7 +6724,7 @@
         </p:blipFill>
         <p:spPr>
           <a:xfrm>
-            <a:off x="4676059" y="2683764"/>
+            <a:off x="4676058" y="2435345"/>
             <a:ext cx="2839881" cy="3835908"/>
           </a:xfrm>
           <a:prstGeom prst="rect">

--- a/Lecture Resources/Lecture Powerpoints/Chunk 8  - 1D Numpy.pptx
+++ b/Lecture Resources/Lecture Powerpoints/Chunk 8  - 1D Numpy.pptx
@@ -759,7 +759,7 @@
           <a:p>
             <a:fld id="{0B6CA2EE-5589-4682-AD7F-744DBF1E81F5}" type="datetimeFigureOut">
               <a:rPr lang="de-DE" smtClean="0"/>
-              <a:t>08.10.2025</a:t>
+              <a:t>09.10.2025</a:t>
             </a:fld>
             <a:endParaRPr lang="de-DE"/>
           </a:p>
@@ -1026,6 +1026,90 @@
 </p:notesMaster>
 </file>
 
+<file path=ppt/notesSlides/notesSlide1.xml><?xml version="1.0" encoding="utf-8"?>
+<p:notes xmlns:a="http://schemas.openxmlformats.org/drawingml/2006/main" xmlns:r="http://schemas.openxmlformats.org/officeDocument/2006/relationships" xmlns:p="http://schemas.openxmlformats.org/presentationml/2006/main">
+  <p:cSld>
+    <p:spTree>
+      <p:nvGrpSpPr>
+        <p:cNvPr id="1" name=""/>
+        <p:cNvGrpSpPr/>
+        <p:nvPr/>
+      </p:nvGrpSpPr>
+      <p:grpSpPr>
+        <a:xfrm>
+          <a:off x="0" y="0"/>
+          <a:ext cx="0" cy="0"/>
+          <a:chOff x="0" y="0"/>
+          <a:chExt cx="0" cy="0"/>
+        </a:xfrm>
+      </p:grpSpPr>
+      <p:sp>
+        <p:nvSpPr>
+          <p:cNvPr id="2" name="Slide Image Placeholder 1"/>
+          <p:cNvSpPr>
+            <a:spLocks noGrp="1" noRot="1" noChangeAspect="1"/>
+          </p:cNvSpPr>
+          <p:nvPr>
+            <p:ph type="sldImg"/>
+          </p:nvPr>
+        </p:nvSpPr>
+        <p:spPr/>
+      </p:sp>
+      <p:sp>
+        <p:nvSpPr>
+          <p:cNvPr id="3" name="Notes Placeholder 2"/>
+          <p:cNvSpPr>
+            <a:spLocks noGrp="1"/>
+          </p:cNvSpPr>
+          <p:nvPr>
+            <p:ph type="body" idx="1"/>
+          </p:nvPr>
+        </p:nvSpPr>
+        <p:spPr/>
+        <p:txBody>
+          <a:bodyPr/>
+          <a:lstStyle/>
+          <a:p>
+            <a:endParaRPr lang="de-DE" dirty="0"/>
+          </a:p>
+        </p:txBody>
+      </p:sp>
+      <p:sp>
+        <p:nvSpPr>
+          <p:cNvPr id="4" name="Slide Number Placeholder 3"/>
+          <p:cNvSpPr>
+            <a:spLocks noGrp="1"/>
+          </p:cNvSpPr>
+          <p:nvPr>
+            <p:ph type="sldNum" sz="quarter" idx="5"/>
+          </p:nvPr>
+        </p:nvSpPr>
+        <p:spPr/>
+        <p:txBody>
+          <a:bodyPr/>
+          <a:lstStyle/>
+          <a:p>
+            <a:fld id="{11422C3B-6429-4381-8F08-B422F3CD22BF}" type="slidenum">
+              <a:rPr lang="de-DE" smtClean="0"/>
+              <a:t>2</a:t>
+            </a:fld>
+            <a:endParaRPr lang="de-DE"/>
+          </a:p>
+        </p:txBody>
+      </p:sp>
+    </p:spTree>
+    <p:extLst>
+      <p:ext uri="{BB962C8B-B14F-4D97-AF65-F5344CB8AC3E}">
+        <p14:creationId xmlns:p14="http://schemas.microsoft.com/office/powerpoint/2010/main" val="2959918295"/>
+      </p:ext>
+    </p:extLst>
+  </p:cSld>
+  <p:clrMapOvr>
+    <a:masterClrMapping/>
+  </p:clrMapOvr>
+</p:notes>
+</file>
+
 <file path=ppt/slideLayouts/slideLayout1.xml><?xml version="1.0" encoding="utf-8"?>
 <p:sldLayout xmlns:a="http://schemas.openxmlformats.org/drawingml/2006/main" xmlns:r="http://schemas.openxmlformats.org/officeDocument/2006/relationships" xmlns:p="http://schemas.openxmlformats.org/presentationml/2006/main" type="title" preserve="1">
   <p:cSld name="Titelfolie">
@@ -1173,7 +1257,7 @@
           <a:p>
             <a:fld id="{ADA51F25-4808-47F4-BF6E-BCDC230DB01C}" type="datetimeFigureOut">
               <a:rPr lang="de-DE" smtClean="0"/>
-              <a:t>08.10.2025</a:t>
+              <a:t>09.10.2025</a:t>
             </a:fld>
             <a:endParaRPr lang="de-DE"/>
           </a:p>
@@ -1371,7 +1455,7 @@
           <a:p>
             <a:fld id="{ADA51F25-4808-47F4-BF6E-BCDC230DB01C}" type="datetimeFigureOut">
               <a:rPr lang="de-DE" smtClean="0"/>
-              <a:t>08.10.2025</a:t>
+              <a:t>09.10.2025</a:t>
             </a:fld>
             <a:endParaRPr lang="de-DE"/>
           </a:p>
@@ -1579,7 +1663,7 @@
           <a:p>
             <a:fld id="{ADA51F25-4808-47F4-BF6E-BCDC230DB01C}" type="datetimeFigureOut">
               <a:rPr lang="de-DE" smtClean="0"/>
-              <a:t>08.10.2025</a:t>
+              <a:t>09.10.2025</a:t>
             </a:fld>
             <a:endParaRPr lang="de-DE"/>
           </a:p>
@@ -1777,7 +1861,7 @@
           <a:p>
             <a:fld id="{ADA51F25-4808-47F4-BF6E-BCDC230DB01C}" type="datetimeFigureOut">
               <a:rPr lang="de-DE" smtClean="0"/>
-              <a:t>08.10.2025</a:t>
+              <a:t>09.10.2025</a:t>
             </a:fld>
             <a:endParaRPr lang="de-DE"/>
           </a:p>
@@ -2052,7 +2136,7 @@
           <a:p>
             <a:fld id="{ADA51F25-4808-47F4-BF6E-BCDC230DB01C}" type="datetimeFigureOut">
               <a:rPr lang="de-DE" smtClean="0"/>
-              <a:t>08.10.2025</a:t>
+              <a:t>09.10.2025</a:t>
             </a:fld>
             <a:endParaRPr lang="de-DE"/>
           </a:p>
@@ -2317,7 +2401,7 @@
           <a:p>
             <a:fld id="{ADA51F25-4808-47F4-BF6E-BCDC230DB01C}" type="datetimeFigureOut">
               <a:rPr lang="de-DE" smtClean="0"/>
-              <a:t>08.10.2025</a:t>
+              <a:t>09.10.2025</a:t>
             </a:fld>
             <a:endParaRPr lang="de-DE"/>
           </a:p>
@@ -2729,7 +2813,7 @@
           <a:p>
             <a:fld id="{ADA51F25-4808-47F4-BF6E-BCDC230DB01C}" type="datetimeFigureOut">
               <a:rPr lang="de-DE" smtClean="0"/>
-              <a:t>08.10.2025</a:t>
+              <a:t>09.10.2025</a:t>
             </a:fld>
             <a:endParaRPr lang="de-DE"/>
           </a:p>
@@ -2870,7 +2954,7 @@
           <a:p>
             <a:fld id="{ADA51F25-4808-47F4-BF6E-BCDC230DB01C}" type="datetimeFigureOut">
               <a:rPr lang="de-DE" smtClean="0"/>
-              <a:t>08.10.2025</a:t>
+              <a:t>09.10.2025</a:t>
             </a:fld>
             <a:endParaRPr lang="de-DE"/>
           </a:p>
@@ -2983,7 +3067,7 @@
           <a:p>
             <a:fld id="{ADA51F25-4808-47F4-BF6E-BCDC230DB01C}" type="datetimeFigureOut">
               <a:rPr lang="de-DE" smtClean="0"/>
-              <a:t>08.10.2025</a:t>
+              <a:t>09.10.2025</a:t>
             </a:fld>
             <a:endParaRPr lang="de-DE"/>
           </a:p>
@@ -3294,7 +3378,7 @@
           <a:p>
             <a:fld id="{ADA51F25-4808-47F4-BF6E-BCDC230DB01C}" type="datetimeFigureOut">
               <a:rPr lang="de-DE" smtClean="0"/>
-              <a:t>08.10.2025</a:t>
+              <a:t>09.10.2025</a:t>
             </a:fld>
             <a:endParaRPr lang="de-DE"/>
           </a:p>
@@ -3582,7 +3666,7 @@
           <a:p>
             <a:fld id="{ADA51F25-4808-47F4-BF6E-BCDC230DB01C}" type="datetimeFigureOut">
               <a:rPr lang="de-DE" smtClean="0"/>
-              <a:t>08.10.2025</a:t>
+              <a:t>09.10.2025</a:t>
             </a:fld>
             <a:endParaRPr lang="de-DE"/>
           </a:p>
@@ -3823,7 +3907,7 @@
           <a:p>
             <a:fld id="{ADA51F25-4808-47F4-BF6E-BCDC230DB01C}" type="datetimeFigureOut">
               <a:rPr lang="de-DE" smtClean="0"/>
-              <a:t>08.10.2025</a:t>
+              <a:t>09.10.2025</a:t>
             </a:fld>
             <a:endParaRPr lang="de-DE"/>
           </a:p>
@@ -4453,66 +4537,68 @@
           <a:p>
             <a:r>
               <a:rPr lang="en-US" dirty="0"/>
-              <a:t>Problem: loops and lists are “slow”: </a:t>
-            </a:r>
-            <a:br>
-              <a:rPr lang="en-US" dirty="0"/>
-            </a:br>
+              <a:t>Problem: loops and lists are “slow”:</a:t>
+            </a:r>
+          </a:p>
+          <a:p>
+            <a:pPr lvl="1">
+              <a:buFont typeface="Aptos" panose="020B0004020202020204" pitchFamily="34" charset="0"/>
+              <a:buChar char="→"/>
+            </a:pPr>
             <a:r>
               <a:rPr lang="en-US" dirty="0">
                 <a:sym typeface="Wingdings" panose="05000000000000000000" pitchFamily="2" charset="2"/>
               </a:rPr>
-              <a:t> Example: square 100 000 000 numbers and sum them</a:t>
-            </a:r>
-            <a:br>
+              <a:t>Example: square 100 000 000 numbers and sum them</a:t>
+            </a:r>
+          </a:p>
+          <a:p>
+            <a:pPr lvl="1">
+              <a:buFont typeface="Aptos" panose="020B0004020202020204" pitchFamily="34" charset="0"/>
+              <a:buChar char="→"/>
+            </a:pPr>
+            <a:r>
               <a:rPr lang="en-US" dirty="0">
                 <a:sym typeface="Wingdings" panose="05000000000000000000" pitchFamily="2" charset="2"/>
               </a:rPr>
-            </a:br>
+              <a:t>28 seconds </a:t>
+            </a:r>
+            <a:endParaRPr lang="en-US" dirty="0"/>
+          </a:p>
+          <a:p>
+            <a:endParaRPr lang="en-US" dirty="0"/>
+          </a:p>
+          <a:p>
+            <a:r>
+              <a:rPr lang="en-US" dirty="0"/>
+              <a:t>Solution: Using C-code in python</a:t>
+            </a:r>
+          </a:p>
+          <a:p>
+            <a:pPr lvl="1">
+              <a:buFont typeface="Aptos" panose="020B0004020202020204" pitchFamily="34" charset="0"/>
+              <a:buChar char="→"/>
+            </a:pPr>
             <a:r>
               <a:rPr lang="en-US" dirty="0">
                 <a:sym typeface="Wingdings" panose="05000000000000000000" pitchFamily="2" charset="2"/>
               </a:rPr>
-              <a:t> 28 seconds </a:t>
-            </a:r>
-            <a:endParaRPr lang="en-US" dirty="0"/>
-          </a:p>
-          <a:p>
-            <a:endParaRPr lang="en-US" dirty="0"/>
-          </a:p>
-          <a:p>
-            <a:r>
-              <a:rPr lang="en-US" dirty="0"/>
-              <a:t>Solution: Using C-code in python</a:t>
-            </a:r>
-            <a:br>
-              <a:rPr lang="en-US" dirty="0"/>
-            </a:br>
-            <a:r>
-              <a:rPr lang="en-US" dirty="0">
-                <a:sym typeface="Wingdings" panose="05000000000000000000" pitchFamily="2" charset="2"/>
-              </a:rPr>
-              <a:t> 0.5 seconds</a:t>
-            </a:r>
-            <a:br>
-              <a:rPr lang="en-US" dirty="0">
-                <a:sym typeface="Wingdings" panose="05000000000000000000" pitchFamily="2" charset="2"/>
-              </a:rPr>
-            </a:br>
-            <a:r>
-              <a:rPr lang="en-US" dirty="0">
-                <a:sym typeface="Wingdings" panose="05000000000000000000" pitchFamily="2" charset="2"/>
-              </a:rPr>
-              <a:t> </a:t>
-            </a:r>
-            <a:r>
-              <a:rPr lang="en-US" dirty="0" err="1">
+              <a:t>0.5 seconds</a:t>
+            </a:r>
+          </a:p>
+          <a:p>
+            <a:pPr lvl="1">
+              <a:buFont typeface="Aptos" panose="020B0004020202020204" pitchFamily="34" charset="0"/>
+              <a:buChar char="→"/>
+            </a:pPr>
+            <a:r>
+              <a:rPr lang="en-US" b="1" dirty="0" err="1">
                 <a:sym typeface="Wingdings" panose="05000000000000000000" pitchFamily="2" charset="2"/>
               </a:rPr>
               <a:t>Numpy</a:t>
             </a:r>
             <a:r>
-              <a:rPr lang="en-US" dirty="0">
+              <a:rPr lang="en-US" b="1" dirty="0">
                 <a:sym typeface="Wingdings" panose="05000000000000000000" pitchFamily="2" charset="2"/>
               </a:rPr>
               <a:t> is typically 10 – 100 x faster</a:t>
@@ -4552,7 +4638,7 @@
           <p:nvPr/>
         </p:nvPicPr>
         <p:blipFill>
-          <a:blip r:embed="rId2"/>
+          <a:blip r:embed="rId3"/>
           <a:stretch>
             <a:fillRect/>
           </a:stretch>
@@ -4592,7 +4678,7 @@
           <p:nvPr/>
         </p:nvPicPr>
         <p:blipFill>
-          <a:blip r:embed="rId3"/>
+          <a:blip r:embed="rId4"/>
           <a:stretch>
             <a:fillRect/>
           </a:stretch>
@@ -4771,7 +4857,7 @@
                                         <p:tgtEl>
                                           <p:spTgt spid="3">
                                             <p:txEl>
-                                              <p:pRg st="2" end="2"/>
+                                              <p:pRg st="4" end="4"/>
                                             </p:txEl>
                                           </p:spTgt>
                                         </p:tgtEl>
@@ -4787,7 +4873,7 @@
                                 </p:cTn>
                               </p:par>
                               <p:par>
-                                <p:cTn id="7" presetID="1" presetClass="entr" presetSubtype="0" fill="hold" nodeType="withEffect">
+                                <p:cTn id="7" presetID="1" presetClass="entr" presetSubtype="0" fill="hold" grpId="0" nodeType="withEffect">
                                   <p:stCondLst>
                                     <p:cond delay="0"/>
                                   </p:stCondLst>
@@ -4795,6 +4881,33 @@
                                     <p:set>
                                       <p:cBhvr>
                                         <p:cTn id="8" dur="1" fill="hold">
+                                          <p:stCondLst>
+                                            <p:cond delay="0"/>
+                                          </p:stCondLst>
+                                        </p:cTn>
+                                        <p:tgtEl>
+                                          <p:spTgt spid="9"/>
+                                        </p:tgtEl>
+                                        <p:attrNameLst>
+                                          <p:attrName>style.visibility</p:attrName>
+                                        </p:attrNameLst>
+                                      </p:cBhvr>
+                                      <p:to>
+                                        <p:strVal val="visible"/>
+                                      </p:to>
+                                    </p:set>
+                                  </p:childTnLst>
+                                </p:cTn>
+                              </p:par>
+                              <p:par>
+                                <p:cTn id="9" presetID="1" presetClass="entr" presetSubtype="0" fill="hold" nodeType="withEffect">
+                                  <p:stCondLst>
+                                    <p:cond delay="0"/>
+                                  </p:stCondLst>
+                                  <p:childTnLst>
+                                    <p:set>
+                                      <p:cBhvr>
+                                        <p:cTn id="10" dur="1" fill="hold">
                                           <p:stCondLst>
                                             <p:cond delay="0"/>
                                           </p:stCondLst>
@@ -4814,20 +4927,55 @@
                                 </p:cTn>
                               </p:par>
                               <p:par>
-                                <p:cTn id="9" presetID="1" presetClass="entr" presetSubtype="0" fill="hold" grpId="0" nodeType="withEffect">
+                                <p:cTn id="11" presetID="1" presetClass="entr" presetSubtype="0" fill="hold" nodeType="withEffect">
                                   <p:stCondLst>
                                     <p:cond delay="0"/>
                                   </p:stCondLst>
                                   <p:childTnLst>
                                     <p:set>
                                       <p:cBhvr>
-                                        <p:cTn id="10" dur="1" fill="hold">
+                                        <p:cTn id="12" dur="1" fill="hold">
                                           <p:stCondLst>
                                             <p:cond delay="0"/>
                                           </p:stCondLst>
                                         </p:cTn>
                                         <p:tgtEl>
-                                          <p:spTgt spid="9"/>
+                                          <p:spTgt spid="3">
+                                            <p:txEl>
+                                              <p:pRg st="5" end="5"/>
+                                            </p:txEl>
+                                          </p:spTgt>
+                                        </p:tgtEl>
+                                        <p:attrNameLst>
+                                          <p:attrName>style.visibility</p:attrName>
+                                        </p:attrNameLst>
+                                      </p:cBhvr>
+                                      <p:to>
+                                        <p:strVal val="visible"/>
+                                      </p:to>
+                                    </p:set>
+                                  </p:childTnLst>
+                                </p:cTn>
+                              </p:par>
+                              <p:par>
+                                <p:cTn id="13" presetID="1" presetClass="entr" presetSubtype="0" fill="hold" nodeType="withEffect">
+                                  <p:stCondLst>
+                                    <p:cond delay="0"/>
+                                  </p:stCondLst>
+                                  <p:childTnLst>
+                                    <p:set>
+                                      <p:cBhvr>
+                                        <p:cTn id="14" dur="1" fill="hold">
+                                          <p:stCondLst>
+                                            <p:cond delay="0"/>
+                                          </p:stCondLst>
+                                        </p:cTn>
+                                        <p:tgtEl>
+                                          <p:spTgt spid="3">
+                                            <p:txEl>
+                                              <p:pRg st="6" end="6"/>
+                                            </p:txEl>
+                                          </p:spTgt>
                                         </p:tgtEl>
                                         <p:attrNameLst>
                                           <p:attrName>style.visibility</p:attrName>
@@ -4847,26 +4995,26 @@
                     </p:cTn>
                   </p:par>
                   <p:par>
-                    <p:cTn id="11" fill="hold">
+                    <p:cTn id="15" fill="hold">
                       <p:stCondLst>
                         <p:cond delay="indefinite"/>
                       </p:stCondLst>
                       <p:childTnLst>
                         <p:par>
-                          <p:cTn id="12" fill="hold">
+                          <p:cTn id="16" fill="hold">
                             <p:stCondLst>
                               <p:cond delay="0"/>
                             </p:stCondLst>
                             <p:childTnLst>
                               <p:par>
-                                <p:cTn id="13" presetID="1" presetClass="entr" presetSubtype="0" fill="hold" nodeType="clickEffect">
+                                <p:cTn id="17" presetID="1" presetClass="entr" presetSubtype="0" fill="hold" nodeType="clickEffect">
                                   <p:stCondLst>
                                     <p:cond delay="0"/>
                                   </p:stCondLst>
                                   <p:childTnLst>
                                     <p:set>
                                       <p:cBhvr>
-                                        <p:cTn id="14" dur="1" fill="hold">
+                                        <p:cTn id="18" dur="1" fill="hold">
                                           <p:stCondLst>
                                             <p:cond delay="0"/>
                                           </p:stCondLst>
@@ -4874,7 +5022,7 @@
                                         <p:tgtEl>
                                           <p:spTgt spid="3">
                                             <p:txEl>
-                                              <p:pRg st="4" end="4"/>
+                                              <p:pRg st="8" end="8"/>
                                             </p:txEl>
                                           </p:spTgt>
                                         </p:tgtEl>

--- a/Lecture Resources/Lecture Powerpoints/Chunk 8  - 1D Numpy.pptx
+++ b/Lecture Resources/Lecture Powerpoints/Chunk 8  - 1D Numpy.pptx
@@ -125,106 +125,13 @@
 <file path=ppt/revisionInfo.xml><?xml version="1.0" encoding="utf-8"?>
 <p1510:revInfo xmlns:a="http://schemas.openxmlformats.org/drawingml/2006/main" xmlns:r="http://schemas.openxmlformats.org/officeDocument/2006/relationships" xmlns:p1510="http://schemas.microsoft.com/office/powerpoint/2015/10/main">
   <p1510:revLst>
-    <p1510:client id="{B11E5EBD-E689-41EA-95CE-02249E0E67A2}" v="20" dt="2025-10-04T16:53:15.542"/>
+    <p1510:client id="{A684553A-6A2C-486D-B411-22D9376678FD}" v="123" dt="2025-10-08T16:38:37.454"/>
   </p1510:revLst>
 </p1510:revInfo>
 </file>
 
 <file path=ppt/changesInfos/changesInfo1.xml><?xml version="1.0" encoding="utf-8"?>
 <pc:chgInfo xmlns:a="http://schemas.openxmlformats.org/drawingml/2006/main" xmlns:r="http://schemas.openxmlformats.org/officeDocument/2006/relationships" xmlns:ac="http://schemas.microsoft.com/office/drawing/2013/main/command" xmlns:pc="http://schemas.microsoft.com/office/powerpoint/2013/main/command">
-  <pc:docChgLst>
-    <pc:chgData name="Jonathan Bollig" userId="8b5d0afe-f106-45e0-8c3f-fd98fa124db1" providerId="ADAL" clId="{891409C9-2319-433B-8001-2E1CE368518E}"/>
-    <pc:docChg chg="custSel addSld delSld modSld">
-      <pc:chgData name="Jonathan Bollig" userId="8b5d0afe-f106-45e0-8c3f-fd98fa124db1" providerId="ADAL" clId="{891409C9-2319-433B-8001-2E1CE368518E}" dt="2025-08-18T13:33:56.347" v="46" actId="47"/>
-      <pc:docMkLst>
-        <pc:docMk/>
-      </pc:docMkLst>
-      <pc:sldChg chg="modSp mod">
-        <pc:chgData name="Jonathan Bollig" userId="8b5d0afe-f106-45e0-8c3f-fd98fa124db1" providerId="ADAL" clId="{891409C9-2319-433B-8001-2E1CE368518E}" dt="2025-08-18T10:03:07.320" v="7" actId="20577"/>
-        <pc:sldMkLst>
-          <pc:docMk/>
-          <pc:sldMk cId="836289018" sldId="256"/>
-        </pc:sldMkLst>
-      </pc:sldChg>
-      <pc:sldChg chg="del">
-        <pc:chgData name="Jonathan Bollig" userId="8b5d0afe-f106-45e0-8c3f-fd98fa124db1" providerId="ADAL" clId="{891409C9-2319-433B-8001-2E1CE368518E}" dt="2025-08-18T09:57:07.527" v="0" actId="47"/>
-        <pc:sldMkLst>
-          <pc:docMk/>
-          <pc:sldMk cId="3656329933" sldId="257"/>
-        </pc:sldMkLst>
-      </pc:sldChg>
-      <pc:sldChg chg="del">
-        <pc:chgData name="Jonathan Bollig" userId="8b5d0afe-f106-45e0-8c3f-fd98fa124db1" providerId="ADAL" clId="{891409C9-2319-433B-8001-2E1CE368518E}" dt="2025-08-18T09:57:07.527" v="0" actId="47"/>
-        <pc:sldMkLst>
-          <pc:docMk/>
-          <pc:sldMk cId="544279955" sldId="258"/>
-        </pc:sldMkLst>
-      </pc:sldChg>
-      <pc:sldChg chg="delSp modSp del mod">
-        <pc:chgData name="Jonathan Bollig" userId="8b5d0afe-f106-45e0-8c3f-fd98fa124db1" providerId="ADAL" clId="{891409C9-2319-433B-8001-2E1CE368518E}" dt="2025-08-18T13:33:56.347" v="46" actId="47"/>
-        <pc:sldMkLst>
-          <pc:docMk/>
-          <pc:sldMk cId="2169503629" sldId="259"/>
-        </pc:sldMkLst>
-      </pc:sldChg>
-      <pc:sldChg chg="add">
-        <pc:chgData name="Jonathan Bollig" userId="8b5d0afe-f106-45e0-8c3f-fd98fa124db1" providerId="ADAL" clId="{891409C9-2319-433B-8001-2E1CE368518E}" dt="2025-08-18T13:33:54.473" v="45"/>
-        <pc:sldMkLst>
-          <pc:docMk/>
-          <pc:sldMk cId="932306145" sldId="260"/>
-        </pc:sldMkLst>
-      </pc:sldChg>
-      <pc:sldChg chg="del">
-        <pc:chgData name="Jonathan Bollig" userId="8b5d0afe-f106-45e0-8c3f-fd98fa124db1" providerId="ADAL" clId="{891409C9-2319-433B-8001-2E1CE368518E}" dt="2025-08-18T09:57:07.527" v="0" actId="47"/>
-        <pc:sldMkLst>
-          <pc:docMk/>
-          <pc:sldMk cId="2533283895" sldId="260"/>
-        </pc:sldMkLst>
-      </pc:sldChg>
-      <pc:sldChg chg="del">
-        <pc:chgData name="Jonathan Bollig" userId="8b5d0afe-f106-45e0-8c3f-fd98fa124db1" providerId="ADAL" clId="{891409C9-2319-433B-8001-2E1CE368518E}" dt="2025-08-18T09:57:07.527" v="0" actId="47"/>
-        <pc:sldMkLst>
-          <pc:docMk/>
-          <pc:sldMk cId="847849653" sldId="261"/>
-        </pc:sldMkLst>
-      </pc:sldChg>
-      <pc:sldChg chg="del">
-        <pc:chgData name="Jonathan Bollig" userId="8b5d0afe-f106-45e0-8c3f-fd98fa124db1" providerId="ADAL" clId="{891409C9-2319-433B-8001-2E1CE368518E}" dt="2025-08-18T09:57:07.527" v="0" actId="47"/>
-        <pc:sldMkLst>
-          <pc:docMk/>
-          <pc:sldMk cId="1908144578" sldId="262"/>
-        </pc:sldMkLst>
-      </pc:sldChg>
-      <pc:sldChg chg="del">
-        <pc:chgData name="Jonathan Bollig" userId="8b5d0afe-f106-45e0-8c3f-fd98fa124db1" providerId="ADAL" clId="{891409C9-2319-433B-8001-2E1CE368518E}" dt="2025-08-18T09:57:07.527" v="0" actId="47"/>
-        <pc:sldMkLst>
-          <pc:docMk/>
-          <pc:sldMk cId="4076698392" sldId="263"/>
-        </pc:sldMkLst>
-      </pc:sldChg>
-      <pc:sldChg chg="del">
-        <pc:chgData name="Jonathan Bollig" userId="8b5d0afe-f106-45e0-8c3f-fd98fa124db1" providerId="ADAL" clId="{891409C9-2319-433B-8001-2E1CE368518E}" dt="2025-08-18T09:57:07.527" v="0" actId="47"/>
-        <pc:sldMkLst>
-          <pc:docMk/>
-          <pc:sldMk cId="3708449378" sldId="264"/>
-        </pc:sldMkLst>
-      </pc:sldChg>
-      <pc:sldChg chg="del">
-        <pc:chgData name="Jonathan Bollig" userId="8b5d0afe-f106-45e0-8c3f-fd98fa124db1" providerId="ADAL" clId="{891409C9-2319-433B-8001-2E1CE368518E}" dt="2025-08-18T09:57:07.527" v="0" actId="47"/>
-        <pc:sldMkLst>
-          <pc:docMk/>
-          <pc:sldMk cId="933916611" sldId="265"/>
-        </pc:sldMkLst>
-      </pc:sldChg>
-      <pc:sldChg chg="del">
-        <pc:chgData name="Jonathan Bollig" userId="8b5d0afe-f106-45e0-8c3f-fd98fa124db1" providerId="ADAL" clId="{891409C9-2319-433B-8001-2E1CE368518E}" dt="2025-08-18T09:57:07.527" v="0" actId="47"/>
-        <pc:sldMkLst>
-          <pc:docMk/>
-          <pc:sldMk cId="2117799034" sldId="266"/>
-        </pc:sldMkLst>
-      </pc:sldChg>
-    </pc:docChg>
-  </pc:docChgLst>
   <pc:docChgLst>
     <pc:chgData name="Jonathan Bollig" userId="8b5d0afe-f106-45e0-8c3f-fd98fa124db1" providerId="ADAL" clId="{B108959E-8160-4214-BA0D-42D2F1070C03}"/>
     <pc:docChg chg="undo custSel addSld modSld sldOrd">
@@ -314,7 +221,7 @@
   <pc:docChgLst>
     <pc:chgData name="Jonathan Bollig" userId="8b5d0afe-f106-45e0-8c3f-fd98fa124db1" providerId="ADAL" clId="{B2469FA9-EBD8-4834-A16D-CBF8EFC907DD}"/>
     <pc:docChg chg="undo custSel addSld delSld modSld">
-      <pc:chgData name="Jonathan Bollig" userId="8b5d0afe-f106-45e0-8c3f-fd98fa124db1" providerId="ADAL" clId="{B2469FA9-EBD8-4834-A16D-CBF8EFC907DD}" dt="2025-10-07T16:25:25.139" v="3087" actId="20577"/>
+      <pc:chgData name="Jonathan Bollig" userId="8b5d0afe-f106-45e0-8c3f-fd98fa124db1" providerId="ADAL" clId="{B2469FA9-EBD8-4834-A16D-CBF8EFC907DD}" dt="2025-10-08T16:38:37.454" v="3210"/>
       <pc:docMkLst>
         <pc:docMk/>
       </pc:docMkLst>
@@ -455,8 +362,8 @@
           </ac:picMkLst>
         </pc:picChg>
       </pc:sldChg>
-      <pc:sldChg chg="addSp delSp modSp new mod">
-        <pc:chgData name="Jonathan Bollig" userId="8b5d0afe-f106-45e0-8c3f-fd98fa124db1" providerId="ADAL" clId="{B2469FA9-EBD8-4834-A16D-CBF8EFC907DD}" dt="2025-10-04T16:34:46.389" v="1907" actId="20577"/>
+      <pc:sldChg chg="addSp delSp modSp new mod modAnim">
+        <pc:chgData name="Jonathan Bollig" userId="8b5d0afe-f106-45e0-8c3f-fd98fa124db1" providerId="ADAL" clId="{B2469FA9-EBD8-4834-A16D-CBF8EFC907DD}" dt="2025-10-08T16:35:40.320" v="3193"/>
         <pc:sldMkLst>
           <pc:docMk/>
           <pc:sldMk cId="3446547959" sldId="271"/>
@@ -470,7 +377,7 @@
           </ac:spMkLst>
         </pc:spChg>
         <pc:spChg chg="mod">
-          <ac:chgData name="Jonathan Bollig" userId="8b5d0afe-f106-45e0-8c3f-fd98fa124db1" providerId="ADAL" clId="{B2469FA9-EBD8-4834-A16D-CBF8EFC907DD}" dt="2025-10-04T16:34:46.389" v="1907" actId="20577"/>
+          <ac:chgData name="Jonathan Bollig" userId="8b5d0afe-f106-45e0-8c3f-fd98fa124db1" providerId="ADAL" clId="{B2469FA9-EBD8-4834-A16D-CBF8EFC907DD}" dt="2025-10-08T16:35:01.029" v="3186" actId="20577"/>
           <ac:spMkLst>
             <pc:docMk/>
             <pc:sldMk cId="3446547959" sldId="271"/>
@@ -533,8 +440,8 @@
           <pc:sldMk cId="4143755219" sldId="272"/>
         </pc:sldMkLst>
       </pc:sldChg>
-      <pc:sldChg chg="addSp delSp modSp new mod">
-        <pc:chgData name="Jonathan Bollig" userId="8b5d0afe-f106-45e0-8c3f-fd98fa124db1" providerId="ADAL" clId="{B2469FA9-EBD8-4834-A16D-CBF8EFC907DD}" dt="2025-10-04T16:45:02.511" v="1988" actId="1076"/>
+      <pc:sldChg chg="addSp delSp modSp new mod modAnim">
+        <pc:chgData name="Jonathan Bollig" userId="8b5d0afe-f106-45e0-8c3f-fd98fa124db1" providerId="ADAL" clId="{B2469FA9-EBD8-4834-A16D-CBF8EFC907DD}" dt="2025-10-08T16:36:48.325" v="3201"/>
         <pc:sldMkLst>
           <pc:docMk/>
           <pc:sldMk cId="3250739031" sldId="273"/>
@@ -572,8 +479,8 @@
           </ac:picMkLst>
         </pc:picChg>
       </pc:sldChg>
-      <pc:sldChg chg="addSp modSp new mod">
-        <pc:chgData name="Jonathan Bollig" userId="8b5d0afe-f106-45e0-8c3f-fd98fa124db1" providerId="ADAL" clId="{B2469FA9-EBD8-4834-A16D-CBF8EFC907DD}" dt="2025-10-05T11:05:25.077" v="3070" actId="20577"/>
+      <pc:sldChg chg="addSp modSp new mod modAnim">
+        <pc:chgData name="Jonathan Bollig" userId="8b5d0afe-f106-45e0-8c3f-fd98fa124db1" providerId="ADAL" clId="{B2469FA9-EBD8-4834-A16D-CBF8EFC907DD}" dt="2025-10-08T16:38:37.454" v="3210"/>
         <pc:sldMkLst>
           <pc:docMk/>
           <pc:sldMk cId="3648031623" sldId="274"/>
@@ -674,6 +581,99 @@
       </pc:sldChg>
     </pc:docChg>
   </pc:docChgLst>
+  <pc:docChgLst>
+    <pc:chgData name="Jonathan Bollig" userId="8b5d0afe-f106-45e0-8c3f-fd98fa124db1" providerId="ADAL" clId="{891409C9-2319-433B-8001-2E1CE368518E}"/>
+    <pc:docChg chg="custSel addSld delSld modSld">
+      <pc:chgData name="Jonathan Bollig" userId="8b5d0afe-f106-45e0-8c3f-fd98fa124db1" providerId="ADAL" clId="{891409C9-2319-433B-8001-2E1CE368518E}" dt="2025-08-18T13:33:56.347" v="46" actId="47"/>
+      <pc:docMkLst>
+        <pc:docMk/>
+      </pc:docMkLst>
+      <pc:sldChg chg="modSp mod">
+        <pc:chgData name="Jonathan Bollig" userId="8b5d0afe-f106-45e0-8c3f-fd98fa124db1" providerId="ADAL" clId="{891409C9-2319-433B-8001-2E1CE368518E}" dt="2025-08-18T10:03:07.320" v="7" actId="20577"/>
+        <pc:sldMkLst>
+          <pc:docMk/>
+          <pc:sldMk cId="836289018" sldId="256"/>
+        </pc:sldMkLst>
+      </pc:sldChg>
+      <pc:sldChg chg="del">
+        <pc:chgData name="Jonathan Bollig" userId="8b5d0afe-f106-45e0-8c3f-fd98fa124db1" providerId="ADAL" clId="{891409C9-2319-433B-8001-2E1CE368518E}" dt="2025-08-18T09:57:07.527" v="0" actId="47"/>
+        <pc:sldMkLst>
+          <pc:docMk/>
+          <pc:sldMk cId="3656329933" sldId="257"/>
+        </pc:sldMkLst>
+      </pc:sldChg>
+      <pc:sldChg chg="del">
+        <pc:chgData name="Jonathan Bollig" userId="8b5d0afe-f106-45e0-8c3f-fd98fa124db1" providerId="ADAL" clId="{891409C9-2319-433B-8001-2E1CE368518E}" dt="2025-08-18T09:57:07.527" v="0" actId="47"/>
+        <pc:sldMkLst>
+          <pc:docMk/>
+          <pc:sldMk cId="544279955" sldId="258"/>
+        </pc:sldMkLst>
+      </pc:sldChg>
+      <pc:sldChg chg="delSp modSp del mod">
+        <pc:chgData name="Jonathan Bollig" userId="8b5d0afe-f106-45e0-8c3f-fd98fa124db1" providerId="ADAL" clId="{891409C9-2319-433B-8001-2E1CE368518E}" dt="2025-08-18T13:33:56.347" v="46" actId="47"/>
+        <pc:sldMkLst>
+          <pc:docMk/>
+          <pc:sldMk cId="2169503629" sldId="259"/>
+        </pc:sldMkLst>
+      </pc:sldChg>
+      <pc:sldChg chg="add">
+        <pc:chgData name="Jonathan Bollig" userId="8b5d0afe-f106-45e0-8c3f-fd98fa124db1" providerId="ADAL" clId="{891409C9-2319-433B-8001-2E1CE368518E}" dt="2025-08-18T13:33:54.473" v="45"/>
+        <pc:sldMkLst>
+          <pc:docMk/>
+          <pc:sldMk cId="932306145" sldId="260"/>
+        </pc:sldMkLst>
+      </pc:sldChg>
+      <pc:sldChg chg="del">
+        <pc:chgData name="Jonathan Bollig" userId="8b5d0afe-f106-45e0-8c3f-fd98fa124db1" providerId="ADAL" clId="{891409C9-2319-433B-8001-2E1CE368518E}" dt="2025-08-18T09:57:07.527" v="0" actId="47"/>
+        <pc:sldMkLst>
+          <pc:docMk/>
+          <pc:sldMk cId="2533283895" sldId="260"/>
+        </pc:sldMkLst>
+      </pc:sldChg>
+      <pc:sldChg chg="del">
+        <pc:chgData name="Jonathan Bollig" userId="8b5d0afe-f106-45e0-8c3f-fd98fa124db1" providerId="ADAL" clId="{891409C9-2319-433B-8001-2E1CE368518E}" dt="2025-08-18T09:57:07.527" v="0" actId="47"/>
+        <pc:sldMkLst>
+          <pc:docMk/>
+          <pc:sldMk cId="847849653" sldId="261"/>
+        </pc:sldMkLst>
+      </pc:sldChg>
+      <pc:sldChg chg="del">
+        <pc:chgData name="Jonathan Bollig" userId="8b5d0afe-f106-45e0-8c3f-fd98fa124db1" providerId="ADAL" clId="{891409C9-2319-433B-8001-2E1CE368518E}" dt="2025-08-18T09:57:07.527" v="0" actId="47"/>
+        <pc:sldMkLst>
+          <pc:docMk/>
+          <pc:sldMk cId="1908144578" sldId="262"/>
+        </pc:sldMkLst>
+      </pc:sldChg>
+      <pc:sldChg chg="del">
+        <pc:chgData name="Jonathan Bollig" userId="8b5d0afe-f106-45e0-8c3f-fd98fa124db1" providerId="ADAL" clId="{891409C9-2319-433B-8001-2E1CE368518E}" dt="2025-08-18T09:57:07.527" v="0" actId="47"/>
+        <pc:sldMkLst>
+          <pc:docMk/>
+          <pc:sldMk cId="4076698392" sldId="263"/>
+        </pc:sldMkLst>
+      </pc:sldChg>
+      <pc:sldChg chg="del">
+        <pc:chgData name="Jonathan Bollig" userId="8b5d0afe-f106-45e0-8c3f-fd98fa124db1" providerId="ADAL" clId="{891409C9-2319-433B-8001-2E1CE368518E}" dt="2025-08-18T09:57:07.527" v="0" actId="47"/>
+        <pc:sldMkLst>
+          <pc:docMk/>
+          <pc:sldMk cId="3708449378" sldId="264"/>
+        </pc:sldMkLst>
+      </pc:sldChg>
+      <pc:sldChg chg="del">
+        <pc:chgData name="Jonathan Bollig" userId="8b5d0afe-f106-45e0-8c3f-fd98fa124db1" providerId="ADAL" clId="{891409C9-2319-433B-8001-2E1CE368518E}" dt="2025-08-18T09:57:07.527" v="0" actId="47"/>
+        <pc:sldMkLst>
+          <pc:docMk/>
+          <pc:sldMk cId="933916611" sldId="265"/>
+        </pc:sldMkLst>
+      </pc:sldChg>
+      <pc:sldChg chg="del">
+        <pc:chgData name="Jonathan Bollig" userId="8b5d0afe-f106-45e0-8c3f-fd98fa124db1" providerId="ADAL" clId="{891409C9-2319-433B-8001-2E1CE368518E}" dt="2025-08-18T09:57:07.527" v="0" actId="47"/>
+        <pc:sldMkLst>
+          <pc:docMk/>
+          <pc:sldMk cId="2117799034" sldId="266"/>
+        </pc:sldMkLst>
+      </pc:sldChg>
+    </pc:docChg>
+  </pc:docChgLst>
 </pc:chgInfo>
 </file>
 
@@ -917,7 +917,7 @@
           <a:p>
             <a:fld id="{11422C3B-6429-4381-8F08-B422F3CD22BF}" type="slidenum">
               <a:rPr lang="de-DE" smtClean="0"/>
-              <a:t>‹#›</a:t>
+              <a:t>‹Nr.›</a:t>
             </a:fld>
             <a:endParaRPr lang="de-DE"/>
           </a:p>
@@ -1026,6 +1026,90 @@
 </p:notesMaster>
 </file>
 
+<file path=ppt/notesSlides/notesSlide1.xml><?xml version="1.0" encoding="utf-8"?>
+<p:notes xmlns:a="http://schemas.openxmlformats.org/drawingml/2006/main" xmlns:r="http://schemas.openxmlformats.org/officeDocument/2006/relationships" xmlns:p="http://schemas.openxmlformats.org/presentationml/2006/main">
+  <p:cSld>
+    <p:spTree>
+      <p:nvGrpSpPr>
+        <p:cNvPr id="1" name=""/>
+        <p:cNvGrpSpPr/>
+        <p:nvPr/>
+      </p:nvGrpSpPr>
+      <p:grpSpPr>
+        <a:xfrm>
+          <a:off x="0" y="0"/>
+          <a:ext cx="0" cy="0"/>
+          <a:chOff x="0" y="0"/>
+          <a:chExt cx="0" cy="0"/>
+        </a:xfrm>
+      </p:grpSpPr>
+      <p:sp>
+        <p:nvSpPr>
+          <p:cNvPr id="2" name="Folienbildplatzhalter 1"/>
+          <p:cNvSpPr>
+            <a:spLocks noGrp="1" noRot="1" noChangeAspect="1"/>
+          </p:cNvSpPr>
+          <p:nvPr>
+            <p:ph type="sldImg"/>
+          </p:nvPr>
+        </p:nvSpPr>
+        <p:spPr/>
+      </p:sp>
+      <p:sp>
+        <p:nvSpPr>
+          <p:cNvPr id="3" name="Notizenplatzhalter 2"/>
+          <p:cNvSpPr>
+            <a:spLocks noGrp="1"/>
+          </p:cNvSpPr>
+          <p:nvPr>
+            <p:ph type="body" idx="1"/>
+          </p:nvPr>
+        </p:nvSpPr>
+        <p:spPr/>
+        <p:txBody>
+          <a:bodyPr/>
+          <a:lstStyle/>
+          <a:p>
+            <a:endParaRPr lang="en-US" dirty="0"/>
+          </a:p>
+        </p:txBody>
+      </p:sp>
+      <p:sp>
+        <p:nvSpPr>
+          <p:cNvPr id="4" name="Foliennummernplatzhalter 3"/>
+          <p:cNvSpPr>
+            <a:spLocks noGrp="1"/>
+          </p:cNvSpPr>
+          <p:nvPr>
+            <p:ph type="sldNum" sz="quarter" idx="5"/>
+          </p:nvPr>
+        </p:nvSpPr>
+        <p:spPr/>
+        <p:txBody>
+          <a:bodyPr/>
+          <a:lstStyle/>
+          <a:p>
+            <a:fld id="{11422C3B-6429-4381-8F08-B422F3CD22BF}" type="slidenum">
+              <a:rPr lang="de-DE" smtClean="0"/>
+              <a:t>7</a:t>
+            </a:fld>
+            <a:endParaRPr lang="de-DE"/>
+          </a:p>
+        </p:txBody>
+      </p:sp>
+    </p:spTree>
+    <p:extLst>
+      <p:ext uri="{BB962C8B-B14F-4D97-AF65-F5344CB8AC3E}">
+        <p14:creationId xmlns:p14="http://schemas.microsoft.com/office/powerpoint/2010/main" val="4078678262"/>
+      </p:ext>
+    </p:extLst>
+  </p:cSld>
+  <p:clrMapOvr>
+    <a:masterClrMapping/>
+  </p:clrMapOvr>
+</p:notes>
+</file>
+
 <file path=ppt/slideLayouts/slideLayout1.xml><?xml version="1.0" encoding="utf-8"?>
 <p:sldLayout xmlns:a="http://schemas.openxmlformats.org/drawingml/2006/main" xmlns:r="http://schemas.openxmlformats.org/officeDocument/2006/relationships" xmlns:p="http://schemas.openxmlformats.org/presentationml/2006/main" type="title" preserve="1">
   <p:cSld name="Titelfolie">
@@ -1227,7 +1311,7 @@
           <a:p>
             <a:fld id="{C018A060-D51C-4243-8F88-61D66D5570B8}" type="slidenum">
               <a:rPr lang="de-DE" smtClean="0"/>
-              <a:t>‹#›</a:t>
+              <a:t>‹Nr.›</a:t>
             </a:fld>
             <a:endParaRPr lang="de-DE"/>
           </a:p>
@@ -1425,7 +1509,7 @@
           <a:p>
             <a:fld id="{C018A060-D51C-4243-8F88-61D66D5570B8}" type="slidenum">
               <a:rPr lang="de-DE" smtClean="0"/>
-              <a:t>‹#›</a:t>
+              <a:t>‹Nr.›</a:t>
             </a:fld>
             <a:endParaRPr lang="de-DE"/>
           </a:p>
@@ -1633,7 +1717,7 @@
           <a:p>
             <a:fld id="{C018A060-D51C-4243-8F88-61D66D5570B8}" type="slidenum">
               <a:rPr lang="de-DE" smtClean="0"/>
-              <a:t>‹#›</a:t>
+              <a:t>‹Nr.›</a:t>
             </a:fld>
             <a:endParaRPr lang="de-DE"/>
           </a:p>
@@ -1831,7 +1915,7 @@
           <a:p>
             <a:fld id="{C018A060-D51C-4243-8F88-61D66D5570B8}" type="slidenum">
               <a:rPr lang="de-DE" smtClean="0"/>
-              <a:t>‹#›</a:t>
+              <a:t>‹Nr.›</a:t>
             </a:fld>
             <a:endParaRPr lang="de-DE"/>
           </a:p>
@@ -2106,7 +2190,7 @@
           <a:p>
             <a:fld id="{C018A060-D51C-4243-8F88-61D66D5570B8}" type="slidenum">
               <a:rPr lang="de-DE" smtClean="0"/>
-              <a:t>‹#›</a:t>
+              <a:t>‹Nr.›</a:t>
             </a:fld>
             <a:endParaRPr lang="de-DE"/>
           </a:p>
@@ -2371,7 +2455,7 @@
           <a:p>
             <a:fld id="{C018A060-D51C-4243-8F88-61D66D5570B8}" type="slidenum">
               <a:rPr lang="de-DE" smtClean="0"/>
-              <a:t>‹#›</a:t>
+              <a:t>‹Nr.›</a:t>
             </a:fld>
             <a:endParaRPr lang="de-DE"/>
           </a:p>
@@ -2783,7 +2867,7 @@
           <a:p>
             <a:fld id="{C018A060-D51C-4243-8F88-61D66D5570B8}" type="slidenum">
               <a:rPr lang="de-DE" smtClean="0"/>
-              <a:t>‹#›</a:t>
+              <a:t>‹Nr.›</a:t>
             </a:fld>
             <a:endParaRPr lang="de-DE"/>
           </a:p>
@@ -2924,7 +3008,7 @@
           <a:p>
             <a:fld id="{C018A060-D51C-4243-8F88-61D66D5570B8}" type="slidenum">
               <a:rPr lang="de-DE" smtClean="0"/>
-              <a:t>‹#›</a:t>
+              <a:t>‹Nr.›</a:t>
             </a:fld>
             <a:endParaRPr lang="de-DE"/>
           </a:p>
@@ -3037,7 +3121,7 @@
           <a:p>
             <a:fld id="{C018A060-D51C-4243-8F88-61D66D5570B8}" type="slidenum">
               <a:rPr lang="de-DE" smtClean="0"/>
-              <a:t>‹#›</a:t>
+              <a:t>‹Nr.›</a:t>
             </a:fld>
             <a:endParaRPr lang="de-DE"/>
           </a:p>
@@ -3348,7 +3432,7 @@
           <a:p>
             <a:fld id="{C018A060-D51C-4243-8F88-61D66D5570B8}" type="slidenum">
               <a:rPr lang="de-DE" smtClean="0"/>
-              <a:t>‹#›</a:t>
+              <a:t>‹Nr.›</a:t>
             </a:fld>
             <a:endParaRPr lang="de-DE"/>
           </a:p>
@@ -3636,7 +3720,7 @@
           <a:p>
             <a:fld id="{C018A060-D51C-4243-8F88-61D66D5570B8}" type="slidenum">
               <a:rPr lang="de-DE" smtClean="0"/>
-              <a:t>‹#›</a:t>
+              <a:t>‹Nr.›</a:t>
             </a:fld>
             <a:endParaRPr lang="de-DE"/>
           </a:p>
@@ -3913,7 +3997,7 @@
           <a:p>
             <a:fld id="{C018A060-D51C-4243-8F88-61D66D5570B8}" type="slidenum">
               <a:rPr lang="de-DE" smtClean="0"/>
-              <a:t>‹#›</a:t>
+              <a:t>‹Nr.›</a:t>
             </a:fld>
             <a:endParaRPr lang="de-DE"/>
           </a:p>
@@ -5140,7 +5224,15 @@
           <a:p>
             <a:r>
               <a:rPr lang="en-US" dirty="0"/>
-              <a:t>Nested lists: Only when all elements have lists of same length.</a:t>
+              <a:t>Nested lists: Possible, but covered in Chunk “2D </a:t>
+            </a:r>
+            <a:r>
+              <a:rPr lang="en-US" dirty="0" err="1"/>
+              <a:t>numpy</a:t>
+            </a:r>
+            <a:r>
+              <a:rPr lang="en-US" dirty="0"/>
+              <a:t> arrays”</a:t>
             </a:r>
           </a:p>
         </p:txBody>
@@ -5415,6 +5507,365 @@
   <p:clrMapOvr>
     <a:masterClrMapping/>
   </p:clrMapOvr>
+  <p:timing>
+    <p:tnLst>
+      <p:par>
+        <p:cTn id="1" dur="indefinite" restart="never" nodeType="tmRoot">
+          <p:childTnLst>
+            <p:seq concurrent="1" nextAc="seek">
+              <p:cTn id="2" dur="indefinite" nodeType="mainSeq">
+                <p:childTnLst>
+                  <p:par>
+                    <p:cTn id="3" fill="hold">
+                      <p:stCondLst>
+                        <p:cond delay="indefinite"/>
+                      </p:stCondLst>
+                      <p:childTnLst>
+                        <p:par>
+                          <p:cTn id="4" fill="hold">
+                            <p:stCondLst>
+                              <p:cond delay="0"/>
+                            </p:stCondLst>
+                            <p:childTnLst>
+                              <p:par>
+                                <p:cTn id="5" presetID="1" presetClass="entr" presetSubtype="0" fill="hold" grpId="0" nodeType="clickEffect">
+                                  <p:stCondLst>
+                                    <p:cond delay="0"/>
+                                  </p:stCondLst>
+                                  <p:childTnLst>
+                                    <p:set>
+                                      <p:cBhvr>
+                                        <p:cTn id="6" dur="1" fill="hold">
+                                          <p:stCondLst>
+                                            <p:cond delay="0"/>
+                                          </p:stCondLst>
+                                        </p:cTn>
+                                        <p:tgtEl>
+                                          <p:spTgt spid="3">
+                                            <p:txEl>
+                                              <p:pRg st="0" end="0"/>
+                                            </p:txEl>
+                                          </p:spTgt>
+                                        </p:tgtEl>
+                                        <p:attrNameLst>
+                                          <p:attrName>style.visibility</p:attrName>
+                                        </p:attrNameLst>
+                                      </p:cBhvr>
+                                      <p:to>
+                                        <p:strVal val="visible"/>
+                                      </p:to>
+                                    </p:set>
+                                  </p:childTnLst>
+                                </p:cTn>
+                              </p:par>
+                            </p:childTnLst>
+                          </p:cTn>
+                        </p:par>
+                      </p:childTnLst>
+                    </p:cTn>
+                  </p:par>
+                  <p:par>
+                    <p:cTn id="7" fill="hold">
+                      <p:stCondLst>
+                        <p:cond delay="indefinite"/>
+                      </p:stCondLst>
+                      <p:childTnLst>
+                        <p:par>
+                          <p:cTn id="8" fill="hold">
+                            <p:stCondLst>
+                              <p:cond delay="0"/>
+                            </p:stCondLst>
+                            <p:childTnLst>
+                              <p:par>
+                                <p:cTn id="9" presetID="1" presetClass="entr" presetSubtype="0" fill="hold" grpId="0" nodeType="clickEffect">
+                                  <p:stCondLst>
+                                    <p:cond delay="0"/>
+                                  </p:stCondLst>
+                                  <p:childTnLst>
+                                    <p:set>
+                                      <p:cBhvr>
+                                        <p:cTn id="10" dur="1" fill="hold">
+                                          <p:stCondLst>
+                                            <p:cond delay="0"/>
+                                          </p:stCondLst>
+                                        </p:cTn>
+                                        <p:tgtEl>
+                                          <p:spTgt spid="3">
+                                            <p:txEl>
+                                              <p:pRg st="1" end="1"/>
+                                            </p:txEl>
+                                          </p:spTgt>
+                                        </p:tgtEl>
+                                        <p:attrNameLst>
+                                          <p:attrName>style.visibility</p:attrName>
+                                        </p:attrNameLst>
+                                      </p:cBhvr>
+                                      <p:to>
+                                        <p:strVal val="visible"/>
+                                      </p:to>
+                                    </p:set>
+                                  </p:childTnLst>
+                                </p:cTn>
+                              </p:par>
+                              <p:par>
+                                <p:cTn id="11" presetID="1" presetClass="entr" presetSubtype="0" fill="hold" nodeType="withEffect">
+                                  <p:stCondLst>
+                                    <p:cond delay="0"/>
+                                  </p:stCondLst>
+                                  <p:childTnLst>
+                                    <p:set>
+                                      <p:cBhvr>
+                                        <p:cTn id="12" dur="1" fill="hold">
+                                          <p:stCondLst>
+                                            <p:cond delay="0"/>
+                                          </p:stCondLst>
+                                        </p:cTn>
+                                        <p:tgtEl>
+                                          <p:spTgt spid="19"/>
+                                        </p:tgtEl>
+                                        <p:attrNameLst>
+                                          <p:attrName>style.visibility</p:attrName>
+                                        </p:attrNameLst>
+                                      </p:cBhvr>
+                                      <p:to>
+                                        <p:strVal val="visible"/>
+                                      </p:to>
+                                    </p:set>
+                                  </p:childTnLst>
+                                </p:cTn>
+                              </p:par>
+                            </p:childTnLst>
+                          </p:cTn>
+                        </p:par>
+                      </p:childTnLst>
+                    </p:cTn>
+                  </p:par>
+                  <p:par>
+                    <p:cTn id="13" fill="hold">
+                      <p:stCondLst>
+                        <p:cond delay="indefinite"/>
+                      </p:stCondLst>
+                      <p:childTnLst>
+                        <p:par>
+                          <p:cTn id="14" fill="hold">
+                            <p:stCondLst>
+                              <p:cond delay="0"/>
+                            </p:stCondLst>
+                            <p:childTnLst>
+                              <p:par>
+                                <p:cTn id="15" presetID="1" presetClass="entr" presetSubtype="0" fill="hold" grpId="0" nodeType="clickEffect">
+                                  <p:stCondLst>
+                                    <p:cond delay="0"/>
+                                  </p:stCondLst>
+                                  <p:childTnLst>
+                                    <p:set>
+                                      <p:cBhvr>
+                                        <p:cTn id="16" dur="1" fill="hold">
+                                          <p:stCondLst>
+                                            <p:cond delay="0"/>
+                                          </p:stCondLst>
+                                        </p:cTn>
+                                        <p:tgtEl>
+                                          <p:spTgt spid="3">
+                                            <p:txEl>
+                                              <p:pRg st="2" end="2"/>
+                                            </p:txEl>
+                                          </p:spTgt>
+                                        </p:tgtEl>
+                                        <p:attrNameLst>
+                                          <p:attrName>style.visibility</p:attrName>
+                                        </p:attrNameLst>
+                                      </p:cBhvr>
+                                      <p:to>
+                                        <p:strVal val="visible"/>
+                                      </p:to>
+                                    </p:set>
+                                  </p:childTnLst>
+                                </p:cTn>
+                              </p:par>
+                              <p:par>
+                                <p:cTn id="17" presetID="1" presetClass="entr" presetSubtype="0" fill="hold" nodeType="withEffect">
+                                  <p:stCondLst>
+                                    <p:cond delay="0"/>
+                                  </p:stCondLst>
+                                  <p:childTnLst>
+                                    <p:set>
+                                      <p:cBhvr>
+                                        <p:cTn id="18" dur="1" fill="hold">
+                                          <p:stCondLst>
+                                            <p:cond delay="0"/>
+                                          </p:stCondLst>
+                                        </p:cTn>
+                                        <p:tgtEl>
+                                          <p:spTgt spid="22"/>
+                                        </p:tgtEl>
+                                        <p:attrNameLst>
+                                          <p:attrName>style.visibility</p:attrName>
+                                        </p:attrNameLst>
+                                      </p:cBhvr>
+                                      <p:to>
+                                        <p:strVal val="visible"/>
+                                      </p:to>
+                                    </p:set>
+                                  </p:childTnLst>
+                                </p:cTn>
+                              </p:par>
+                            </p:childTnLst>
+                          </p:cTn>
+                        </p:par>
+                      </p:childTnLst>
+                    </p:cTn>
+                  </p:par>
+                  <p:par>
+                    <p:cTn id="19" fill="hold">
+                      <p:stCondLst>
+                        <p:cond delay="indefinite"/>
+                      </p:stCondLst>
+                      <p:childTnLst>
+                        <p:par>
+                          <p:cTn id="20" fill="hold">
+                            <p:stCondLst>
+                              <p:cond delay="0"/>
+                            </p:stCondLst>
+                            <p:childTnLst>
+                              <p:par>
+                                <p:cTn id="21" presetID="1" presetClass="entr" presetSubtype="0" fill="hold" grpId="0" nodeType="clickEffect">
+                                  <p:stCondLst>
+                                    <p:cond delay="0"/>
+                                  </p:stCondLst>
+                                  <p:childTnLst>
+                                    <p:set>
+                                      <p:cBhvr>
+                                        <p:cTn id="22" dur="1" fill="hold">
+                                          <p:stCondLst>
+                                            <p:cond delay="0"/>
+                                          </p:stCondLst>
+                                        </p:cTn>
+                                        <p:tgtEl>
+                                          <p:spTgt spid="3">
+                                            <p:txEl>
+                                              <p:pRg st="3" end="3"/>
+                                            </p:txEl>
+                                          </p:spTgt>
+                                        </p:tgtEl>
+                                        <p:attrNameLst>
+                                          <p:attrName>style.visibility</p:attrName>
+                                        </p:attrNameLst>
+                                      </p:cBhvr>
+                                      <p:to>
+                                        <p:strVal val="visible"/>
+                                      </p:to>
+                                    </p:set>
+                                  </p:childTnLst>
+                                </p:cTn>
+                              </p:par>
+                              <p:par>
+                                <p:cTn id="23" presetID="1" presetClass="entr" presetSubtype="0" fill="hold" nodeType="withEffect">
+                                  <p:stCondLst>
+                                    <p:cond delay="0"/>
+                                  </p:stCondLst>
+                                  <p:childTnLst>
+                                    <p:set>
+                                      <p:cBhvr>
+                                        <p:cTn id="24" dur="1" fill="hold">
+                                          <p:stCondLst>
+                                            <p:cond delay="0"/>
+                                          </p:stCondLst>
+                                        </p:cTn>
+                                        <p:tgtEl>
+                                          <p:spTgt spid="25"/>
+                                        </p:tgtEl>
+                                        <p:attrNameLst>
+                                          <p:attrName>style.visibility</p:attrName>
+                                        </p:attrNameLst>
+                                      </p:cBhvr>
+                                      <p:to>
+                                        <p:strVal val="visible"/>
+                                      </p:to>
+                                    </p:set>
+                                  </p:childTnLst>
+                                </p:cTn>
+                              </p:par>
+                            </p:childTnLst>
+                          </p:cTn>
+                        </p:par>
+                      </p:childTnLst>
+                    </p:cTn>
+                  </p:par>
+                  <p:par>
+                    <p:cTn id="25" fill="hold">
+                      <p:stCondLst>
+                        <p:cond delay="indefinite"/>
+                      </p:stCondLst>
+                      <p:childTnLst>
+                        <p:par>
+                          <p:cTn id="26" fill="hold">
+                            <p:stCondLst>
+                              <p:cond delay="0"/>
+                            </p:stCondLst>
+                            <p:childTnLst>
+                              <p:par>
+                                <p:cTn id="27" presetID="1" presetClass="entr" presetSubtype="0" fill="hold" grpId="0" nodeType="clickEffect">
+                                  <p:stCondLst>
+                                    <p:cond delay="0"/>
+                                  </p:stCondLst>
+                                  <p:childTnLst>
+                                    <p:set>
+                                      <p:cBhvr>
+                                        <p:cTn id="28" dur="1" fill="hold">
+                                          <p:stCondLst>
+                                            <p:cond delay="0"/>
+                                          </p:stCondLst>
+                                        </p:cTn>
+                                        <p:tgtEl>
+                                          <p:spTgt spid="3">
+                                            <p:txEl>
+                                              <p:pRg st="6" end="6"/>
+                                            </p:txEl>
+                                          </p:spTgt>
+                                        </p:tgtEl>
+                                        <p:attrNameLst>
+                                          <p:attrName>style.visibility</p:attrName>
+                                        </p:attrNameLst>
+                                      </p:cBhvr>
+                                      <p:to>
+                                        <p:strVal val="visible"/>
+                                      </p:to>
+                                    </p:set>
+                                  </p:childTnLst>
+                                </p:cTn>
+                              </p:par>
+                            </p:childTnLst>
+                          </p:cTn>
+                        </p:par>
+                      </p:childTnLst>
+                    </p:cTn>
+                  </p:par>
+                </p:childTnLst>
+              </p:cTn>
+              <p:prevCondLst>
+                <p:cond evt="onPrev" delay="0">
+                  <p:tgtEl>
+                    <p:sldTgt/>
+                  </p:tgtEl>
+                </p:cond>
+              </p:prevCondLst>
+              <p:nextCondLst>
+                <p:cond evt="onNext" delay="0">
+                  <p:tgtEl>
+                    <p:sldTgt/>
+                  </p:tgtEl>
+                </p:cond>
+              </p:nextCondLst>
+            </p:seq>
+          </p:childTnLst>
+        </p:cTn>
+      </p:par>
+    </p:tnLst>
+    <p:bldLst>
+      <p:bldP spid="3" grpId="0" uiExpand="1" build="p"/>
+    </p:bldLst>
+  </p:timing>
 </p:sld>
 </file>
 
@@ -5601,6 +6052,191 @@
   <p:clrMapOvr>
     <a:masterClrMapping/>
   </p:clrMapOvr>
+  <p:timing>
+    <p:tnLst>
+      <p:par>
+        <p:cTn id="1" dur="indefinite" restart="never" nodeType="tmRoot">
+          <p:childTnLst>
+            <p:seq concurrent="1" nextAc="seek">
+              <p:cTn id="2" dur="indefinite" nodeType="mainSeq">
+                <p:childTnLst>
+                  <p:par>
+                    <p:cTn id="3" fill="hold">
+                      <p:stCondLst>
+                        <p:cond delay="indefinite"/>
+                      </p:stCondLst>
+                      <p:childTnLst>
+                        <p:par>
+                          <p:cTn id="4" fill="hold">
+                            <p:stCondLst>
+                              <p:cond delay="0"/>
+                            </p:stCondLst>
+                            <p:childTnLst>
+                              <p:par>
+                                <p:cTn id="5" presetID="1" presetClass="entr" presetSubtype="0" fill="hold" grpId="0" nodeType="clickEffect">
+                                  <p:stCondLst>
+                                    <p:cond delay="0"/>
+                                  </p:stCondLst>
+                                  <p:childTnLst>
+                                    <p:set>
+                                      <p:cBhvr>
+                                        <p:cTn id="6" dur="1" fill="hold">
+                                          <p:stCondLst>
+                                            <p:cond delay="0"/>
+                                          </p:stCondLst>
+                                        </p:cTn>
+                                        <p:tgtEl>
+                                          <p:spTgt spid="3">
+                                            <p:txEl>
+                                              <p:pRg st="0" end="0"/>
+                                            </p:txEl>
+                                          </p:spTgt>
+                                        </p:tgtEl>
+                                        <p:attrNameLst>
+                                          <p:attrName>style.visibility</p:attrName>
+                                        </p:attrNameLst>
+                                      </p:cBhvr>
+                                      <p:to>
+                                        <p:strVal val="visible"/>
+                                      </p:to>
+                                    </p:set>
+                                  </p:childTnLst>
+                                </p:cTn>
+                              </p:par>
+                              <p:par>
+                                <p:cTn id="7" presetID="1" presetClass="entr" presetSubtype="0" fill="hold" nodeType="withEffect">
+                                  <p:stCondLst>
+                                    <p:cond delay="0"/>
+                                  </p:stCondLst>
+                                  <p:childTnLst>
+                                    <p:set>
+                                      <p:cBhvr>
+                                        <p:cTn id="8" dur="1" fill="hold">
+                                          <p:stCondLst>
+                                            <p:cond delay="0"/>
+                                          </p:stCondLst>
+                                        </p:cTn>
+                                        <p:tgtEl>
+                                          <p:spTgt spid="7"/>
+                                        </p:tgtEl>
+                                        <p:attrNameLst>
+                                          <p:attrName>style.visibility</p:attrName>
+                                        </p:attrNameLst>
+                                      </p:cBhvr>
+                                      <p:to>
+                                        <p:strVal val="visible"/>
+                                      </p:to>
+                                    </p:set>
+                                  </p:childTnLst>
+                                </p:cTn>
+                              </p:par>
+                            </p:childTnLst>
+                          </p:cTn>
+                        </p:par>
+                      </p:childTnLst>
+                    </p:cTn>
+                  </p:par>
+                  <p:par>
+                    <p:cTn id="9" fill="hold">
+                      <p:stCondLst>
+                        <p:cond delay="indefinite"/>
+                      </p:stCondLst>
+                      <p:childTnLst>
+                        <p:par>
+                          <p:cTn id="10" fill="hold">
+                            <p:stCondLst>
+                              <p:cond delay="0"/>
+                            </p:stCondLst>
+                            <p:childTnLst>
+                              <p:par>
+                                <p:cTn id="11" presetID="1" presetClass="entr" presetSubtype="0" fill="hold" grpId="0" nodeType="clickEffect">
+                                  <p:stCondLst>
+                                    <p:cond delay="0"/>
+                                  </p:stCondLst>
+                                  <p:childTnLst>
+                                    <p:set>
+                                      <p:cBhvr>
+                                        <p:cTn id="12" dur="1" fill="hold">
+                                          <p:stCondLst>
+                                            <p:cond delay="0"/>
+                                          </p:stCondLst>
+                                        </p:cTn>
+                                        <p:tgtEl>
+                                          <p:spTgt spid="3">
+                                            <p:txEl>
+                                              <p:pRg st="5" end="5"/>
+                                            </p:txEl>
+                                          </p:spTgt>
+                                        </p:tgtEl>
+                                        <p:attrNameLst>
+                                          <p:attrName>style.visibility</p:attrName>
+                                        </p:attrNameLst>
+                                      </p:cBhvr>
+                                      <p:to>
+                                        <p:strVal val="visible"/>
+                                      </p:to>
+                                    </p:set>
+                                  </p:childTnLst>
+                                </p:cTn>
+                              </p:par>
+                              <p:par>
+                                <p:cTn id="13" presetID="1" presetClass="entr" presetSubtype="0" fill="hold" nodeType="withEffect">
+                                  <p:stCondLst>
+                                    <p:cond delay="0"/>
+                                  </p:stCondLst>
+                                  <p:childTnLst>
+                                    <p:set>
+                                      <p:cBhvr>
+                                        <p:cTn id="14" dur="1" fill="hold">
+                                          <p:stCondLst>
+                                            <p:cond delay="0"/>
+                                          </p:stCondLst>
+                                        </p:cTn>
+                                        <p:tgtEl>
+                                          <p:spTgt spid="9"/>
+                                        </p:tgtEl>
+                                        <p:attrNameLst>
+                                          <p:attrName>style.visibility</p:attrName>
+                                        </p:attrNameLst>
+                                      </p:cBhvr>
+                                      <p:to>
+                                        <p:strVal val="visible"/>
+                                      </p:to>
+                                    </p:set>
+                                  </p:childTnLst>
+                                </p:cTn>
+                              </p:par>
+                            </p:childTnLst>
+                          </p:cTn>
+                        </p:par>
+                      </p:childTnLst>
+                    </p:cTn>
+                  </p:par>
+                </p:childTnLst>
+              </p:cTn>
+              <p:prevCondLst>
+                <p:cond evt="onPrev" delay="0">
+                  <p:tgtEl>
+                    <p:sldTgt/>
+                  </p:tgtEl>
+                </p:cond>
+              </p:prevCondLst>
+              <p:nextCondLst>
+                <p:cond evt="onNext" delay="0">
+                  <p:tgtEl>
+                    <p:sldTgt/>
+                  </p:tgtEl>
+                </p:cond>
+              </p:nextCondLst>
+            </p:seq>
+          </p:childTnLst>
+        </p:cTn>
+      </p:par>
+    </p:tnLst>
+    <p:bldLst>
+      <p:bldP spid="3" grpId="0" uiExpand="1" build="p"/>
+    </p:bldLst>
+  </p:timing>
 </p:sld>
 </file>
 
@@ -6038,6 +6674,267 @@
   <p:clrMapOvr>
     <a:masterClrMapping/>
   </p:clrMapOvr>
+  <p:timing>
+    <p:tnLst>
+      <p:par>
+        <p:cTn id="1" dur="indefinite" restart="never" nodeType="tmRoot">
+          <p:childTnLst>
+            <p:seq concurrent="1" nextAc="seek">
+              <p:cTn id="2" dur="indefinite" nodeType="mainSeq">
+                <p:childTnLst>
+                  <p:par>
+                    <p:cTn id="3" fill="hold">
+                      <p:stCondLst>
+                        <p:cond delay="indefinite"/>
+                      </p:stCondLst>
+                      <p:childTnLst>
+                        <p:par>
+                          <p:cTn id="4" fill="hold">
+                            <p:stCondLst>
+                              <p:cond delay="0"/>
+                            </p:stCondLst>
+                            <p:childTnLst>
+                              <p:par>
+                                <p:cTn id="5" presetID="1" presetClass="entr" presetSubtype="0" fill="hold" grpId="0" nodeType="clickEffect">
+                                  <p:stCondLst>
+                                    <p:cond delay="0"/>
+                                  </p:stCondLst>
+                                  <p:childTnLst>
+                                    <p:set>
+                                      <p:cBhvr>
+                                        <p:cTn id="6" dur="1" fill="hold">
+                                          <p:stCondLst>
+                                            <p:cond delay="0"/>
+                                          </p:stCondLst>
+                                        </p:cTn>
+                                        <p:tgtEl>
+                                          <p:spTgt spid="3">
+                                            <p:txEl>
+                                              <p:pRg st="0" end="0"/>
+                                            </p:txEl>
+                                          </p:spTgt>
+                                        </p:tgtEl>
+                                        <p:attrNameLst>
+                                          <p:attrName>style.visibility</p:attrName>
+                                        </p:attrNameLst>
+                                      </p:cBhvr>
+                                      <p:to>
+                                        <p:strVal val="visible"/>
+                                      </p:to>
+                                    </p:set>
+                                  </p:childTnLst>
+                                </p:cTn>
+                              </p:par>
+                              <p:par>
+                                <p:cTn id="7" presetID="1" presetClass="entr" presetSubtype="0" fill="hold" nodeType="withEffect">
+                                  <p:stCondLst>
+                                    <p:cond delay="0"/>
+                                  </p:stCondLst>
+                                  <p:childTnLst>
+                                    <p:set>
+                                      <p:cBhvr>
+                                        <p:cTn id="8" dur="1" fill="hold">
+                                          <p:stCondLst>
+                                            <p:cond delay="0"/>
+                                          </p:stCondLst>
+                                        </p:cTn>
+                                        <p:tgtEl>
+                                          <p:spTgt spid="5"/>
+                                        </p:tgtEl>
+                                        <p:attrNameLst>
+                                          <p:attrName>style.visibility</p:attrName>
+                                        </p:attrNameLst>
+                                      </p:cBhvr>
+                                      <p:to>
+                                        <p:strVal val="visible"/>
+                                      </p:to>
+                                    </p:set>
+                                  </p:childTnLst>
+                                </p:cTn>
+                              </p:par>
+                            </p:childTnLst>
+                          </p:cTn>
+                        </p:par>
+                      </p:childTnLst>
+                    </p:cTn>
+                  </p:par>
+                  <p:par>
+                    <p:cTn id="9" fill="hold">
+                      <p:stCondLst>
+                        <p:cond delay="indefinite"/>
+                      </p:stCondLst>
+                      <p:childTnLst>
+                        <p:par>
+                          <p:cTn id="10" fill="hold">
+                            <p:stCondLst>
+                              <p:cond delay="0"/>
+                            </p:stCondLst>
+                            <p:childTnLst>
+                              <p:par>
+                                <p:cTn id="11" presetID="1" presetClass="entr" presetSubtype="0" fill="hold" grpId="0" nodeType="clickEffect">
+                                  <p:stCondLst>
+                                    <p:cond delay="0"/>
+                                  </p:stCondLst>
+                                  <p:childTnLst>
+                                    <p:set>
+                                      <p:cBhvr>
+                                        <p:cTn id="12" dur="1" fill="hold">
+                                          <p:stCondLst>
+                                            <p:cond delay="0"/>
+                                          </p:stCondLst>
+                                        </p:cTn>
+                                        <p:tgtEl>
+                                          <p:spTgt spid="3">
+                                            <p:txEl>
+                                              <p:pRg st="4" end="4"/>
+                                            </p:txEl>
+                                          </p:spTgt>
+                                        </p:tgtEl>
+                                        <p:attrNameLst>
+                                          <p:attrName>style.visibility</p:attrName>
+                                        </p:attrNameLst>
+                                      </p:cBhvr>
+                                      <p:to>
+                                        <p:strVal val="visible"/>
+                                      </p:to>
+                                    </p:set>
+                                  </p:childTnLst>
+                                </p:cTn>
+                              </p:par>
+                              <p:par>
+                                <p:cTn id="13" presetID="1" presetClass="entr" presetSubtype="0" fill="hold" nodeType="withEffect">
+                                  <p:stCondLst>
+                                    <p:cond delay="0"/>
+                                  </p:stCondLst>
+                                  <p:childTnLst>
+                                    <p:set>
+                                      <p:cBhvr>
+                                        <p:cTn id="14" dur="1" fill="hold">
+                                          <p:stCondLst>
+                                            <p:cond delay="0"/>
+                                          </p:stCondLst>
+                                        </p:cTn>
+                                        <p:tgtEl>
+                                          <p:spTgt spid="7"/>
+                                        </p:tgtEl>
+                                        <p:attrNameLst>
+                                          <p:attrName>style.visibility</p:attrName>
+                                        </p:attrNameLst>
+                                      </p:cBhvr>
+                                      <p:to>
+                                        <p:strVal val="visible"/>
+                                      </p:to>
+                                    </p:set>
+                                  </p:childTnLst>
+                                </p:cTn>
+                              </p:par>
+                            </p:childTnLst>
+                          </p:cTn>
+                        </p:par>
+                      </p:childTnLst>
+                    </p:cTn>
+                  </p:par>
+                  <p:par>
+                    <p:cTn id="15" fill="hold">
+                      <p:stCondLst>
+                        <p:cond delay="indefinite"/>
+                      </p:stCondLst>
+                      <p:childTnLst>
+                        <p:par>
+                          <p:cTn id="16" fill="hold">
+                            <p:stCondLst>
+                              <p:cond delay="0"/>
+                            </p:stCondLst>
+                            <p:childTnLst>
+                              <p:par>
+                                <p:cTn id="17" presetID="1" presetClass="entr" presetSubtype="0" fill="hold" grpId="0" nodeType="clickEffect">
+                                  <p:stCondLst>
+                                    <p:cond delay="0"/>
+                                  </p:stCondLst>
+                                  <p:childTnLst>
+                                    <p:set>
+                                      <p:cBhvr>
+                                        <p:cTn id="18" dur="1" fill="hold">
+                                          <p:stCondLst>
+                                            <p:cond delay="0"/>
+                                          </p:stCondLst>
+                                        </p:cTn>
+                                        <p:tgtEl>
+                                          <p:spTgt spid="3">
+                                            <p:txEl>
+                                              <p:pRg st="7" end="7"/>
+                                            </p:txEl>
+                                          </p:spTgt>
+                                        </p:tgtEl>
+                                        <p:attrNameLst>
+                                          <p:attrName>style.visibility</p:attrName>
+                                        </p:attrNameLst>
+                                      </p:cBhvr>
+                                      <p:to>
+                                        <p:strVal val="visible"/>
+                                      </p:to>
+                                    </p:set>
+                                  </p:childTnLst>
+                                </p:cTn>
+                              </p:par>
+                              <p:par>
+                                <p:cTn id="19" presetID="1" presetClass="entr" presetSubtype="0" fill="hold" nodeType="withEffect">
+                                  <p:stCondLst>
+                                    <p:cond delay="0"/>
+                                  </p:stCondLst>
+                                  <p:childTnLst>
+                                    <p:set>
+                                      <p:cBhvr>
+                                        <p:cTn id="20" dur="1" fill="hold">
+                                          <p:stCondLst>
+                                            <p:cond delay="0"/>
+                                          </p:stCondLst>
+                                        </p:cTn>
+                                        <p:tgtEl>
+                                          <p:spTgt spid="9"/>
+                                        </p:tgtEl>
+                                        <p:attrNameLst>
+                                          <p:attrName>style.visibility</p:attrName>
+                                        </p:attrNameLst>
+                                      </p:cBhvr>
+                                      <p:to>
+                                        <p:strVal val="visible"/>
+                                      </p:to>
+                                    </p:set>
+                                  </p:childTnLst>
+                                </p:cTn>
+                              </p:par>
+                            </p:childTnLst>
+                          </p:cTn>
+                        </p:par>
+                      </p:childTnLst>
+                    </p:cTn>
+                  </p:par>
+                </p:childTnLst>
+              </p:cTn>
+              <p:prevCondLst>
+                <p:cond evt="onPrev" delay="0">
+                  <p:tgtEl>
+                    <p:sldTgt/>
+                  </p:tgtEl>
+                </p:cond>
+              </p:prevCondLst>
+              <p:nextCondLst>
+                <p:cond evt="onNext" delay="0">
+                  <p:tgtEl>
+                    <p:sldTgt/>
+                  </p:tgtEl>
+                </p:cond>
+              </p:nextCondLst>
+            </p:seq>
+          </p:childTnLst>
+        </p:cTn>
+      </p:par>
+    </p:tnLst>
+    <p:bldLst>
+      <p:bldP spid="3" grpId="0" uiExpand="1" build="p"/>
+    </p:bldLst>
+  </p:timing>
 </p:sld>
 </file>
 
